--- a/examples/sample_fixed.pptx
+++ b/examples/sample_fixed.pptx
@@ -1684,7 +1684,7 @@
                 <a:spcPct val="110000"/>
               </a:lnSpc>
               <a:buNone/>
-              <a:defRPr lang="en-US" sz="2200" b="1" dirty="0">
+              <a:defRPr lang="ja-JP" altLang="en-US" sz="2200" b="1" dirty="0">
                 <a:solidFill>
                   <a:srgbClr val="1B2A49"/>
                 </a:solidFill>
@@ -1701,7 +1701,7 @@
               </a:lnSpc>
               <a:buNone/>
             </a:pPr>
-            <a:endParaRPr lang="en-US" sz="2200" dirty="0"/>
+            <a:endParaRPr lang="ja-JP" sz="2200" dirty="0"/>
           </a:p>
         </p:txBody>
       </p:sp>
@@ -2211,7 +2211,7 @@
               <a:buNone/>
             </a:pPr>
             <a:r>
-              <a:rPr lang="en-US" sz="3400" b="1" dirty="0">
+              <a:rPr lang="ja-JP" altLang="en-US" sz="3400" b="1" dirty="0">
                 <a:solidFill>
                   <a:srgbClr val="FFFFFF"/>
                 </a:solidFill>
@@ -2221,7 +2221,7 @@
               </a:rPr>
               <a:t>受注業務のデジタル化で、</a:t>
             </a:r>
-            <a:endParaRPr lang="en-US" sz="3400" dirty="0"/>
+            <a:endParaRPr lang="ja-JP" sz="3400" dirty="0"/>
           </a:p>
           <a:p>
             <a:pPr indent="0" marL="0">
@@ -2231,7 +2231,7 @@
               <a:buNone/>
             </a:pPr>
             <a:r>
-              <a:rPr lang="en-US" sz="3400" b="1" dirty="0">
+              <a:rPr lang="ja-JP" altLang="en-US" sz="3400" b="1" dirty="0">
                 <a:solidFill>
                   <a:srgbClr val="FFFFFF"/>
                 </a:solidFill>
@@ -2241,7 +2241,7 @@
               </a:rPr>
               <a:t>月120時間の手作業を削減する</a:t>
             </a:r>
-            <a:endParaRPr lang="en-US" sz="3400" dirty="0"/>
+            <a:endParaRPr lang="ja-JP" sz="3400" dirty="0"/>
           </a:p>
         </p:txBody>
       </p:sp>
@@ -2270,7 +2270,7 @@
               <a:buNone/>
             </a:pPr>
             <a:r>
-              <a:rPr lang="en-US" sz="1800" dirty="0">
+              <a:rPr lang="ja-JP" altLang="en-US" sz="1800" dirty="0">
                 <a:solidFill>
                   <a:srgbClr val="D6DCE4"/>
                 </a:solidFill>
@@ -2280,7 +2280,7 @@
               </a:rPr>
               <a:t>株式会社サンプル精工 様　ご提案資料</a:t>
             </a:r>
-            <a:endParaRPr lang="en-US" sz="1800" dirty="0"/>
+            <a:endParaRPr lang="ja-JP" sz="1800" dirty="0"/>
           </a:p>
         </p:txBody>
       </p:sp>
@@ -2309,7 +2309,7 @@
               <a:buNone/>
             </a:pPr>
             <a:r>
-              <a:rPr lang="en-US" sz="1200" dirty="0">
+              <a:rPr lang="ja-JP" altLang="en-US" sz="1200" dirty="0">
                 <a:solidFill>
                   <a:srgbClr val="D6DCE4"/>
                 </a:solidFill>
@@ -2319,7 +2319,7 @@
               </a:rPr>
               <a:t>2026年10月　｜　株式会社サンプルコンサルティング</a:t>
             </a:r>
-            <a:endParaRPr lang="en-US" sz="1200" dirty="0"/>
+            <a:endParaRPr lang="ja-JP" sz="1200" dirty="0"/>
           </a:p>
         </p:txBody>
       </p:sp>
@@ -2378,7 +2378,7 @@
               <a:buNone/>
             </a:pPr>
             <a:r>
-              <a:rPr lang="en-US" sz="2200" b="1" dirty="0">
+              <a:rPr lang="ja-JP" altLang="en-US" sz="2200" b="1" dirty="0">
                 <a:solidFill>
                   <a:srgbClr val="1B2A49"/>
                 </a:solidFill>
@@ -2388,7 +2388,7 @@
               </a:rPr>
               <a:t>11月中にご判断いただければ、来年3月の繁忙期前に稼働できる</a:t>
             </a:r>
-            <a:endParaRPr lang="en-US" sz="2200" dirty="0"/>
+            <a:endParaRPr lang="ja-JP" sz="2200" dirty="0"/>
           </a:p>
         </p:txBody>
       </p:sp>
@@ -2430,7 +2430,7 @@
                         <a:buNone/>
                       </a:pPr>
                       <a:r>
-                        <a:rPr lang="en-US" sz="1300" b="1" dirty="0">
+                        <a:rPr lang="ja-JP" altLang="en-US" sz="1300" b="1" dirty="0">
                           <a:solidFill>
                             <a:srgbClr val="FFFFFF"/>
                           </a:solidFill>
@@ -2440,7 +2440,7 @@
                         </a:rPr>
                         <a:t>#</a:t>
                       </a:r>
-                      <a:endParaRPr lang="en-US" sz="1300" dirty="0">
+                      <a:endParaRPr lang="ja-JP" sz="1300" dirty="0">
                         <a:latin typeface="Meiryo" charset="0"/>
                         <a:ea typeface="Meiryo" charset="0"/>
                         <a:cs typeface="Meiryo" charset="0"/>
@@ -2498,7 +2498,7 @@
                         <a:buNone/>
                       </a:pPr>
                       <a:r>
-                        <a:rPr lang="en-US" sz="1300" b="1" dirty="0">
+                        <a:rPr lang="ja-JP" altLang="en-US" sz="1300" b="1" dirty="0">
                           <a:solidFill>
                             <a:srgbClr val="FFFFFF"/>
                           </a:solidFill>
@@ -2508,7 +2508,7 @@
                         </a:rPr>
                         <a:t>実施事項</a:t>
                       </a:r>
-                      <a:endParaRPr lang="en-US" sz="1300" dirty="0">
+                      <a:endParaRPr lang="ja-JP" sz="1300" dirty="0">
                         <a:latin typeface="Meiryo" charset="0"/>
                         <a:ea typeface="Meiryo" charset="0"/>
                         <a:cs typeface="Meiryo" charset="0"/>
@@ -2566,7 +2566,7 @@
                         <a:buNone/>
                       </a:pPr>
                       <a:r>
-                        <a:rPr lang="en-US" sz="1300" b="1" dirty="0">
+                        <a:rPr lang="ja-JP" altLang="en-US" sz="1300" b="1" dirty="0">
                           <a:solidFill>
                             <a:srgbClr val="FFFFFF"/>
                           </a:solidFill>
@@ -2576,7 +2576,7 @@
                         </a:rPr>
                         <a:t>担当</a:t>
                       </a:r>
-                      <a:endParaRPr lang="en-US" sz="1300" dirty="0">
+                      <a:endParaRPr lang="ja-JP" sz="1300" dirty="0">
                         <a:latin typeface="Meiryo" charset="0"/>
                         <a:ea typeface="Meiryo" charset="0"/>
                         <a:cs typeface="Meiryo" charset="0"/>
@@ -2634,7 +2634,7 @@
                         <a:buNone/>
                       </a:pPr>
                       <a:r>
-                        <a:rPr lang="en-US" sz="1300" b="1" dirty="0">
+                        <a:rPr lang="ja-JP" altLang="en-US" sz="1300" b="1" dirty="0">
                           <a:solidFill>
                             <a:srgbClr val="FFFFFF"/>
                           </a:solidFill>
@@ -2644,7 +2644,7 @@
                         </a:rPr>
                         <a:t>期限</a:t>
                       </a:r>
-                      <a:endParaRPr lang="en-US" sz="1300" dirty="0">
+                      <a:endParaRPr lang="ja-JP" sz="1300" dirty="0">
                         <a:latin typeface="Meiryo" charset="0"/>
                         <a:ea typeface="Meiryo" charset="0"/>
                         <a:cs typeface="Meiryo" charset="0"/>
@@ -2704,7 +2704,7 @@
                         <a:buNone/>
                       </a:pPr>
                       <a:r>
-                        <a:rPr lang="en-US" sz="1300" b="1" dirty="0">
+                        <a:rPr lang="ja-JP" altLang="en-US" sz="1300" b="1" dirty="0">
                           <a:solidFill>
                             <a:srgbClr val="D9822B"/>
                           </a:solidFill>
@@ -2714,7 +2714,7 @@
                         </a:rPr>
                         <a:t>1</a:t>
                       </a:r>
-                      <a:endParaRPr lang="en-US" sz="1300" dirty="0">
+                      <a:endParaRPr lang="ja-JP" sz="1300" dirty="0">
                         <a:latin typeface="Meiryo" charset="0"/>
                         <a:ea typeface="Meiryo" charset="0"/>
                         <a:cs typeface="Meiryo" charset="0"/>
@@ -2769,7 +2769,7 @@
                         <a:buNone/>
                       </a:pPr>
                       <a:r>
-                        <a:rPr lang="en-US" sz="1300" dirty="0">
+                        <a:rPr lang="ja-JP" altLang="en-US" sz="1300" dirty="0">
                           <a:solidFill>
                             <a:srgbClr val="222222"/>
                           </a:solidFill>
@@ -2779,7 +2779,7 @@
                         </a:rPr>
                         <a:t>本提案のご承認と予算の確保</a:t>
                       </a:r>
-                      <a:endParaRPr lang="en-US" sz="1300" dirty="0">
+                      <a:endParaRPr lang="ja-JP" sz="1300" dirty="0">
                         <a:latin typeface="Meiryo" charset="0"/>
                         <a:ea typeface="Meiryo" charset="0"/>
                         <a:cs typeface="Meiryo" charset="0"/>
@@ -2834,7 +2834,7 @@
                         <a:buNone/>
                       </a:pPr>
                       <a:r>
-                        <a:rPr lang="en-US" sz="1300" dirty="0">
+                        <a:rPr lang="ja-JP" altLang="en-US" sz="1300" dirty="0">
                           <a:solidFill>
                             <a:srgbClr val="222222"/>
                           </a:solidFill>
@@ -2844,7 +2844,7 @@
                         </a:rPr>
                         <a:t>サンプル精工 様</a:t>
                       </a:r>
-                      <a:endParaRPr lang="en-US" sz="1300" dirty="0">
+                      <a:endParaRPr lang="ja-JP" sz="1300" dirty="0">
                         <a:latin typeface="Meiryo" charset="0"/>
                         <a:ea typeface="Meiryo" charset="0"/>
                         <a:cs typeface="Meiryo" charset="0"/>
@@ -2899,7 +2899,7 @@
                         <a:buNone/>
                       </a:pPr>
                       <a:r>
-                        <a:rPr lang="en-US" sz="1300" dirty="0">
+                        <a:rPr lang="ja-JP" altLang="en-US" sz="1300" dirty="0">
                           <a:solidFill>
                             <a:srgbClr val="222222"/>
                           </a:solidFill>
@@ -2909,7 +2909,7 @@
                         </a:rPr>
                         <a:t>11月14日</a:t>
                       </a:r>
-                      <a:endParaRPr lang="en-US" sz="1300" dirty="0">
+                      <a:endParaRPr lang="ja-JP" sz="1300" dirty="0">
                         <a:latin typeface="Meiryo" charset="0"/>
                         <a:ea typeface="Meiryo" charset="0"/>
                         <a:cs typeface="Meiryo" charset="0"/>
@@ -2966,7 +2966,7 @@
                         <a:buNone/>
                       </a:pPr>
                       <a:r>
-                        <a:rPr lang="en-US" sz="1300" b="1" dirty="0">
+                        <a:rPr lang="ja-JP" altLang="en-US" sz="1300" b="1" dirty="0">
                           <a:solidFill>
                             <a:srgbClr val="D9822B"/>
                           </a:solidFill>
@@ -2976,7 +2976,7 @@
                         </a:rPr>
                         <a:t>2</a:t>
                       </a:r>
-                      <a:endParaRPr lang="en-US" sz="1300" dirty="0">
+                      <a:endParaRPr lang="ja-JP" sz="1300" dirty="0">
                         <a:latin typeface="Meiryo" charset="0"/>
                         <a:ea typeface="Meiryo" charset="0"/>
                         <a:cs typeface="Meiryo" charset="0"/>
@@ -3031,7 +3031,7 @@
                         <a:buNone/>
                       </a:pPr>
                       <a:r>
-                        <a:rPr lang="en-US" sz="1300" dirty="0">
+                        <a:rPr lang="ja-JP" altLang="en-US" sz="1300" dirty="0">
                           <a:solidFill>
                             <a:srgbClr val="222222"/>
                           </a:solidFill>
@@ -3041,7 +3041,7 @@
                         </a:rPr>
                         <a:t>注文書サンプル（直近3か月分）のご提供</a:t>
                       </a:r>
-                      <a:endParaRPr lang="en-US" sz="1300" dirty="0">
+                      <a:endParaRPr lang="ja-JP" sz="1300" dirty="0">
                         <a:latin typeface="Meiryo" charset="0"/>
                         <a:ea typeface="Meiryo" charset="0"/>
                         <a:cs typeface="Meiryo" charset="0"/>
@@ -3096,7 +3096,7 @@
                         <a:buNone/>
                       </a:pPr>
                       <a:r>
-                        <a:rPr lang="en-US" sz="1300" dirty="0">
+                        <a:rPr lang="ja-JP" altLang="en-US" sz="1300" dirty="0">
                           <a:solidFill>
                             <a:srgbClr val="222222"/>
                           </a:solidFill>
@@ -3106,7 +3106,7 @@
                         </a:rPr>
                         <a:t>サンプル精工 様</a:t>
                       </a:r>
-                      <a:endParaRPr lang="en-US" sz="1300" dirty="0">
+                      <a:endParaRPr lang="ja-JP" sz="1300" dirty="0">
                         <a:latin typeface="Meiryo" charset="0"/>
                         <a:ea typeface="Meiryo" charset="0"/>
                         <a:cs typeface="Meiryo" charset="0"/>
@@ -3161,7 +3161,7 @@
                         <a:buNone/>
                       </a:pPr>
                       <a:r>
-                        <a:rPr lang="en-US" sz="1300" dirty="0">
+                        <a:rPr lang="ja-JP" altLang="en-US" sz="1300" dirty="0">
                           <a:solidFill>
                             <a:srgbClr val="222222"/>
                           </a:solidFill>
@@ -3171,7 +3171,7 @@
                         </a:rPr>
                         <a:t>11月21日</a:t>
                       </a:r>
-                      <a:endParaRPr lang="en-US" sz="1300" dirty="0">
+                      <a:endParaRPr lang="ja-JP" sz="1300" dirty="0">
                         <a:latin typeface="Meiryo" charset="0"/>
                         <a:ea typeface="Meiryo" charset="0"/>
                         <a:cs typeface="Meiryo" charset="0"/>
@@ -3228,7 +3228,7 @@
                         <a:buNone/>
                       </a:pPr>
                       <a:r>
-                        <a:rPr lang="en-US" sz="1300" b="1" dirty="0">
+                        <a:rPr lang="ja-JP" altLang="en-US" sz="1300" b="1" dirty="0">
                           <a:solidFill>
                             <a:srgbClr val="D9822B"/>
                           </a:solidFill>
@@ -3238,7 +3238,7 @@
                         </a:rPr>
                         <a:t>3</a:t>
                       </a:r>
-                      <a:endParaRPr lang="en-US" sz="1300" dirty="0">
+                      <a:endParaRPr lang="ja-JP" sz="1300" dirty="0">
                         <a:latin typeface="Meiryo" charset="0"/>
                         <a:ea typeface="Meiryo" charset="0"/>
                         <a:cs typeface="Meiryo" charset="0"/>
@@ -3293,7 +3293,7 @@
                         <a:buNone/>
                       </a:pPr>
                       <a:r>
-                        <a:rPr lang="en-US" sz="1300" dirty="0">
+                        <a:rPr lang="ja-JP" altLang="en-US" sz="1300" dirty="0">
                           <a:solidFill>
                             <a:srgbClr val="222222"/>
                           </a:solidFill>
@@ -3303,7 +3303,7 @@
                         </a:rPr>
                         <a:t>要件定義書のご提出</a:t>
                       </a:r>
-                      <a:endParaRPr lang="en-US" sz="1300" dirty="0">
+                      <a:endParaRPr lang="ja-JP" sz="1300" dirty="0">
                         <a:latin typeface="Meiryo" charset="0"/>
                         <a:ea typeface="Meiryo" charset="0"/>
                         <a:cs typeface="Meiryo" charset="0"/>
@@ -3358,7 +3358,7 @@
                         <a:buNone/>
                       </a:pPr>
                       <a:r>
-                        <a:rPr lang="en-US" sz="1300" dirty="0">
+                        <a:rPr lang="ja-JP" altLang="en-US" sz="1300" dirty="0">
                           <a:solidFill>
                             <a:srgbClr val="222222"/>
                           </a:solidFill>
@@ -3368,7 +3368,7 @@
                         </a:rPr>
                         <a:t>当社</a:t>
                       </a:r>
-                      <a:endParaRPr lang="en-US" sz="1300" dirty="0">
+                      <a:endParaRPr lang="ja-JP" sz="1300" dirty="0">
                         <a:latin typeface="Meiryo" charset="0"/>
                         <a:ea typeface="Meiryo" charset="0"/>
                         <a:cs typeface="Meiryo" charset="0"/>
@@ -3423,7 +3423,7 @@
                         <a:buNone/>
                       </a:pPr>
                       <a:r>
-                        <a:rPr lang="en-US" sz="1300" dirty="0">
+                        <a:rPr lang="ja-JP" altLang="en-US" sz="1300" dirty="0">
                           <a:solidFill>
                             <a:srgbClr val="222222"/>
                           </a:solidFill>
@@ -3433,7 +3433,7 @@
                         </a:rPr>
                         <a:t>11月28日</a:t>
                       </a:r>
-                      <a:endParaRPr lang="en-US" sz="1300" dirty="0">
+                      <a:endParaRPr lang="ja-JP" sz="1300" dirty="0">
                         <a:latin typeface="Meiryo" charset="0"/>
                         <a:ea typeface="Meiryo" charset="0"/>
                         <a:cs typeface="Meiryo" charset="0"/>
@@ -3490,7 +3490,7 @@
                         <a:buNone/>
                       </a:pPr>
                       <a:r>
-                        <a:rPr lang="en-US" sz="1300" b="1" dirty="0">
+                        <a:rPr lang="ja-JP" altLang="en-US" sz="1300" b="1" dirty="0">
                           <a:solidFill>
                             <a:srgbClr val="D9822B"/>
                           </a:solidFill>
@@ -3500,7 +3500,7 @@
                         </a:rPr>
                         <a:t>4</a:t>
                       </a:r>
-                      <a:endParaRPr lang="en-US" sz="1300" dirty="0">
+                      <a:endParaRPr lang="ja-JP" sz="1300" dirty="0">
                         <a:latin typeface="Meiryo" charset="0"/>
                         <a:ea typeface="Meiryo" charset="0"/>
                         <a:cs typeface="Meiryo" charset="0"/>
@@ -3555,7 +3555,7 @@
                         <a:buNone/>
                       </a:pPr>
                       <a:r>
-                        <a:rPr lang="en-US" sz="1300" dirty="0">
+                        <a:rPr lang="ja-JP" altLang="en-US" sz="1300" dirty="0">
                           <a:solidFill>
                             <a:srgbClr val="222222"/>
                           </a:solidFill>
@@ -3565,7 +3565,7 @@
                         </a:rPr>
                         <a:t>キックオフミーティング</a:t>
                       </a:r>
-                      <a:endParaRPr lang="en-US" sz="1300" dirty="0">
+                      <a:endParaRPr lang="ja-JP" sz="1300" dirty="0">
                         <a:latin typeface="Meiryo" charset="0"/>
                         <a:ea typeface="Meiryo" charset="0"/>
                         <a:cs typeface="Meiryo" charset="0"/>
@@ -3620,7 +3620,7 @@
                         <a:buNone/>
                       </a:pPr>
                       <a:r>
-                        <a:rPr lang="en-US" sz="1300" dirty="0">
+                        <a:rPr lang="ja-JP" altLang="en-US" sz="1300" dirty="0">
                           <a:solidFill>
                             <a:srgbClr val="222222"/>
                           </a:solidFill>
@@ -3630,7 +3630,7 @@
                         </a:rPr>
                         <a:t>双方</a:t>
                       </a:r>
-                      <a:endParaRPr lang="en-US" sz="1300" dirty="0">
+                      <a:endParaRPr lang="ja-JP" sz="1300" dirty="0">
                         <a:latin typeface="Meiryo" charset="0"/>
                         <a:ea typeface="Meiryo" charset="0"/>
                         <a:cs typeface="Meiryo" charset="0"/>
@@ -3685,7 +3685,7 @@
                         <a:buNone/>
                       </a:pPr>
                       <a:r>
-                        <a:rPr lang="en-US" sz="1300" dirty="0">
+                        <a:rPr lang="ja-JP" altLang="en-US" sz="1300" dirty="0">
                           <a:solidFill>
                             <a:srgbClr val="222222"/>
                           </a:solidFill>
@@ -3695,7 +3695,7 @@
                         </a:rPr>
                         <a:t>12月第1週</a:t>
                       </a:r>
-                      <a:endParaRPr lang="en-US" sz="1300" dirty="0">
+                      <a:endParaRPr lang="ja-JP" sz="1300" dirty="0">
                         <a:latin typeface="Meiryo" charset="0"/>
                         <a:ea typeface="Meiryo" charset="0"/>
                         <a:cs typeface="Meiryo" charset="0"/>
@@ -3849,7 +3849,7 @@
               <a:buNone/>
             </a:pPr>
             <a:r>
-              <a:rPr lang="en-US" sz="2200" b="1" dirty="0">
+              <a:rPr lang="ja-JP" altLang="en-US" sz="2200" b="1" dirty="0">
                 <a:solidFill>
                   <a:srgbClr val="1B2A49"/>
                 </a:solidFill>
@@ -3859,7 +3859,7 @@
               </a:rPr>
               <a:t>受注処理の7割を自動化し、年間約860万円のコスト削減を見込む</a:t>
             </a:r>
-            <a:endParaRPr lang="en-US" sz="2200" dirty="0"/>
+            <a:endParaRPr lang="ja-JP" sz="2200" dirty="0"/>
           </a:p>
         </p:txBody>
       </p:sp>
@@ -3908,7 +3908,7 @@
               <a:buNone/>
             </a:pPr>
             <a:r>
-              <a:rPr lang="en-US" sz="2600" b="1" dirty="0">
+              <a:rPr lang="ja-JP" altLang="en-US" sz="2600" b="1" dirty="0">
                 <a:solidFill>
                   <a:srgbClr val="D9822B"/>
                 </a:solidFill>
@@ -3918,7 +3918,7 @@
               </a:rPr>
               <a:t>1</a:t>
             </a:r>
-            <a:endParaRPr lang="en-US" sz="2600" dirty="0"/>
+            <a:endParaRPr lang="ja-JP" sz="2600" dirty="0"/>
           </a:p>
         </p:txBody>
       </p:sp>
@@ -3950,7 +3950,7 @@
               <a:buNone/>
             </a:pPr>
             <a:r>
-              <a:rPr lang="en-US" sz="1600" b="1" dirty="0">
+              <a:rPr lang="ja-JP" altLang="en-US" sz="1600" b="1" dirty="0">
                 <a:solidFill>
                   <a:srgbClr val="1B2A49"/>
                 </a:solidFill>
@@ -3960,7 +3960,7 @@
               </a:rPr>
               <a:t>現状：受注1件あたり平均18分、うち12分が転記と確認作業</a:t>
             </a:r>
-            <a:endParaRPr lang="en-US" sz="1600" dirty="0"/>
+            <a:endParaRPr lang="ja-JP" sz="1600" dirty="0"/>
           </a:p>
           <a:p>
             <a:pPr indent="0" marL="0">
@@ -3970,7 +3970,7 @@
               <a:buNone/>
             </a:pPr>
             <a:r>
-              <a:rPr lang="en-US" sz="1300" dirty="0">
+              <a:rPr lang="ja-JP" altLang="en-US" sz="1300" dirty="0">
                 <a:solidFill>
                   <a:srgbClr val="222222"/>
                 </a:solidFill>
@@ -3980,7 +3980,7 @@
               </a:rPr>
               <a:t>FAX・メールで届く注文書を、担当者3名が基幹システムへ手入力している</a:t>
             </a:r>
-            <a:endParaRPr lang="en-US" sz="1600" dirty="0"/>
+            <a:endParaRPr lang="ja-JP" sz="1600" dirty="0"/>
           </a:p>
         </p:txBody>
       </p:sp>
@@ -4029,7 +4029,7 @@
               <a:buNone/>
             </a:pPr>
             <a:r>
-              <a:rPr lang="en-US" sz="2600" b="1" dirty="0">
+              <a:rPr lang="ja-JP" altLang="en-US" sz="2600" b="1" dirty="0">
                 <a:solidFill>
                   <a:srgbClr val="D9822B"/>
                 </a:solidFill>
@@ -4039,7 +4039,7 @@
               </a:rPr>
               <a:t>2</a:t>
             </a:r>
-            <a:endParaRPr lang="en-US" sz="2600" dirty="0"/>
+            <a:endParaRPr lang="ja-JP" sz="2600" dirty="0"/>
           </a:p>
         </p:txBody>
       </p:sp>
@@ -4071,7 +4071,7 @@
               <a:buNone/>
             </a:pPr>
             <a:r>
-              <a:rPr lang="en-US" sz="1600" b="1" dirty="0">
+              <a:rPr lang="ja-JP" altLang="en-US" sz="1600" b="1" dirty="0">
                 <a:solidFill>
                   <a:srgbClr val="1B2A49"/>
                 </a:solidFill>
@@ -4081,7 +4081,7 @@
               </a:rPr>
               <a:t>課題：転記ミスによる誤出荷が月6件、繁忙期は残業が月40時間超</a:t>
             </a:r>
-            <a:endParaRPr lang="en-US" sz="1600" dirty="0"/>
+            <a:endParaRPr lang="ja-JP" sz="1600" dirty="0"/>
           </a:p>
           <a:p>
             <a:pPr indent="0" marL="0">
@@ -4091,7 +4091,7 @@
               <a:buNone/>
             </a:pPr>
             <a:r>
-              <a:rPr lang="en-US" sz="1300" dirty="0">
+              <a:rPr lang="ja-JP" altLang="en-US" sz="1300" dirty="0">
                 <a:solidFill>
                   <a:srgbClr val="222222"/>
                 </a:solidFill>
@@ -4101,7 +4101,7 @@
               </a:rPr>
               <a:t>属人化しており、担当者の休暇時に処理が滞る</a:t>
             </a:r>
-            <a:endParaRPr lang="en-US" sz="1600" dirty="0"/>
+            <a:endParaRPr lang="ja-JP" sz="1600" dirty="0"/>
           </a:p>
         </p:txBody>
       </p:sp>
@@ -4150,7 +4150,7 @@
               <a:buNone/>
             </a:pPr>
             <a:r>
-              <a:rPr lang="en-US" sz="2600" b="1" dirty="0">
+              <a:rPr lang="ja-JP" altLang="en-US" sz="2600" b="1" dirty="0">
                 <a:solidFill>
                   <a:srgbClr val="D9822B"/>
                 </a:solidFill>
@@ -4160,7 +4160,7 @@
               </a:rPr>
               <a:t>3</a:t>
             </a:r>
-            <a:endParaRPr lang="en-US" sz="2600" dirty="0"/>
+            <a:endParaRPr lang="ja-JP" sz="2600" dirty="0"/>
           </a:p>
         </p:txBody>
       </p:sp>
@@ -4192,7 +4192,7 @@
               <a:buNone/>
             </a:pPr>
             <a:r>
-              <a:rPr lang="en-US" sz="1600" b="1" dirty="0">
+              <a:rPr lang="ja-JP" altLang="en-US" sz="1600" b="1" dirty="0">
                 <a:solidFill>
                   <a:srgbClr val="1B2A49"/>
                 </a:solidFill>
@@ -4202,7 +4202,7 @@
               </a:rPr>
               <a:t>打ち手：注文書の読み取り→システム登録→確認依頼までを自動化</a:t>
             </a:r>
-            <a:endParaRPr lang="en-US" sz="1600" dirty="0"/>
+            <a:endParaRPr lang="ja-JP" sz="1600" dirty="0"/>
           </a:p>
           <a:p>
             <a:pPr indent="0" marL="0">
@@ -4212,7 +4212,7 @@
               <a:buNone/>
             </a:pPr>
             <a:r>
-              <a:rPr lang="en-US" sz="1300" dirty="0">
+              <a:rPr lang="ja-JP" altLang="en-US" sz="1300" dirty="0">
                 <a:solidFill>
                   <a:srgbClr val="222222"/>
                 </a:solidFill>
@@ -4222,7 +4222,7 @@
               </a:rPr>
               <a:t>AI-OCRと既存の基幹システムAPIを連携。人は例外処理と最終確認のみ</a:t>
             </a:r>
-            <a:endParaRPr lang="en-US" sz="1600" dirty="0"/>
+            <a:endParaRPr lang="ja-JP" sz="1600" dirty="0"/>
           </a:p>
         </p:txBody>
       </p:sp>
@@ -4271,7 +4271,7 @@
               <a:buNone/>
             </a:pPr>
             <a:r>
-              <a:rPr lang="en-US" sz="2600" b="1" dirty="0">
+              <a:rPr lang="ja-JP" altLang="en-US" sz="2600" b="1" dirty="0">
                 <a:solidFill>
                   <a:srgbClr val="D9822B"/>
                 </a:solidFill>
@@ -4281,7 +4281,7 @@
               </a:rPr>
               <a:t>4</a:t>
             </a:r>
-            <a:endParaRPr lang="en-US" sz="2600" dirty="0"/>
+            <a:endParaRPr lang="ja-JP" sz="2600" dirty="0"/>
           </a:p>
         </p:txBody>
       </p:sp>
@@ -4313,7 +4313,7 @@
               <a:buNone/>
             </a:pPr>
             <a:r>
-              <a:rPr lang="en-US" sz="1600" b="1" dirty="0">
+              <a:rPr lang="ja-JP" altLang="en-US" sz="1600" b="1" dirty="0">
                 <a:solidFill>
                   <a:srgbClr val="1B2A49"/>
                 </a:solidFill>
@@ -4323,7 +4323,7 @@
               </a:rPr>
               <a:t>効果：月120時間の削減、誤出荷ゼロ化、投資回収は約7か月</a:t>
             </a:r>
-            <a:endParaRPr lang="en-US" sz="1600" dirty="0"/>
+            <a:endParaRPr lang="ja-JP" sz="1600" dirty="0"/>
           </a:p>
           <a:p>
             <a:pPr indent="0" marL="0">
@@ -4333,7 +4333,7 @@
               <a:buNone/>
             </a:pPr>
             <a:r>
-              <a:rPr lang="en-US" sz="1300" dirty="0">
+              <a:rPr lang="ja-JP" altLang="en-US" sz="1300" dirty="0">
                 <a:solidFill>
                   <a:srgbClr val="222222"/>
                 </a:solidFill>
@@ -4343,7 +4343,7 @@
               </a:rPr>
               <a:t>初期費用480万円、運用費月8万円（詳細は p.6）</a:t>
             </a:r>
-            <a:endParaRPr lang="en-US" sz="1600" dirty="0"/>
+            <a:endParaRPr lang="ja-JP" sz="1600" dirty="0"/>
           </a:p>
         </p:txBody>
       </p:sp>
@@ -4450,7 +4450,7 @@
               <a:buNone/>
             </a:pPr>
             <a:r>
-              <a:rPr lang="en-US" sz="2200" b="1" dirty="0">
+              <a:rPr lang="ja-JP" altLang="en-US" sz="2200" b="1" dirty="0">
                 <a:solidFill>
                   <a:srgbClr val="1B2A49"/>
                 </a:solidFill>
@@ -4460,7 +4460,7 @@
               </a:rPr>
               <a:t>ミスと残業の根本原因は「人による転記」に集中している</a:t>
             </a:r>
-            <a:endParaRPr lang="en-US" sz="2200" dirty="0"/>
+            <a:endParaRPr lang="ja-JP" sz="2200" dirty="0"/>
           </a:p>
         </p:txBody>
       </p:sp>
@@ -4489,7 +4489,7 @@
               <a:buNone/>
             </a:pPr>
             <a:r>
-              <a:rPr lang="en-US" sz="1400" dirty="0">
+              <a:rPr lang="ja-JP" altLang="en-US" sz="1400" dirty="0">
                 <a:solidFill>
                   <a:srgbClr val="5B6770"/>
                 </a:solidFill>
@@ -4499,7 +4499,7 @@
               </a:rPr>
               <a:t>業務フローを分解すると、問題の8割は注文書の読み取りと転記の工程で発生している</a:t>
             </a:r>
-            <a:endParaRPr lang="en-US" sz="1400" dirty="0"/>
+            <a:endParaRPr lang="ja-JP" sz="1400" dirty="0"/>
           </a:p>
         </p:txBody>
       </p:sp>
@@ -4528,7 +4528,7 @@
               <a:buNone/>
             </a:pPr>
             <a:r>
-              <a:rPr lang="en-US" sz="900" dirty="0">
+              <a:rPr lang="ja-JP" altLang="en-US" sz="900" dirty="0">
                 <a:solidFill>
                   <a:srgbClr val="5B6770"/>
                 </a:solidFill>
@@ -4538,7 +4538,7 @@
               </a:rPr>
               <a:t>出所：受注担当者3名へのヒアリング（2026年9月）、受注データ（2026年4〜9月）</a:t>
             </a:r>
-            <a:endParaRPr lang="en-US" sz="900" dirty="0"/>
+            <a:endParaRPr lang="ja-JP" sz="900" dirty="0"/>
           </a:p>
         </p:txBody>
       </p:sp>
@@ -4587,7 +4587,7 @@
               <a:buNone/>
             </a:pPr>
             <a:r>
-              <a:rPr lang="en-US" sz="1400" b="1" dirty="0">
+              <a:rPr lang="ja-JP" altLang="en-US" sz="1400" b="1" dirty="0">
                 <a:solidFill>
                   <a:srgbClr val="FFFFFF"/>
                 </a:solidFill>
@@ -4597,7 +4597,7 @@
               </a:rPr>
               <a:t>現状</a:t>
             </a:r>
-            <a:endParaRPr lang="en-US" sz="1400" dirty="0"/>
+            <a:endParaRPr lang="ja-JP" sz="1400" dirty="0"/>
           </a:p>
         </p:txBody>
       </p:sp>
@@ -4646,7 +4646,7 @@
               <a:buNone/>
             </a:pPr>
             <a:r>
-              <a:rPr lang="en-US" sz="1400" b="1" dirty="0">
+              <a:rPr lang="ja-JP" altLang="en-US" sz="1400" b="1" dirty="0">
                 <a:solidFill>
                   <a:srgbClr val="FFFFFF"/>
                 </a:solidFill>
@@ -4656,7 +4656,7 @@
               </a:rPr>
               <a:t>課題</a:t>
             </a:r>
-            <a:endParaRPr lang="en-US" sz="1400" dirty="0"/>
+            <a:endParaRPr lang="ja-JP" sz="1400" dirty="0"/>
           </a:p>
         </p:txBody>
       </p:sp>
@@ -4705,7 +4705,7 @@
               <a:buNone/>
             </a:pPr>
             <a:r>
-              <a:rPr lang="en-US" sz="1400" b="1" dirty="0">
+              <a:rPr lang="ja-JP" altLang="en-US" sz="1400" b="1" dirty="0">
                 <a:solidFill>
                   <a:srgbClr val="FFFFFF"/>
                 </a:solidFill>
@@ -4715,7 +4715,7 @@
               </a:rPr>
               <a:t>打ち手</a:t>
             </a:r>
-            <a:endParaRPr lang="en-US" sz="1400" dirty="0"/>
+            <a:endParaRPr lang="ja-JP" sz="1400" dirty="0"/>
           </a:p>
         </p:txBody>
       </p:sp>
@@ -4764,7 +4764,7 @@
               <a:buNone/>
             </a:pPr>
             <a:r>
-              <a:rPr lang="en-US" sz="1300" dirty="0">
+              <a:rPr lang="ja-JP" altLang="en-US" sz="1300" dirty="0">
                 <a:solidFill>
                   <a:srgbClr val="222222"/>
                 </a:solidFill>
@@ -4774,7 +4774,7 @@
               </a:rPr>
               <a:t>FAX・PDFの注文書を目視で読み取り</a:t>
             </a:r>
-            <a:endParaRPr lang="en-US" sz="1300" dirty="0"/>
+            <a:endParaRPr lang="ja-JP" sz="1300" dirty="0"/>
           </a:p>
         </p:txBody>
       </p:sp>
@@ -4843,7 +4843,7 @@
               <a:buNone/>
             </a:pPr>
             <a:r>
-              <a:rPr lang="en-US" sz="1300" dirty="0">
+              <a:rPr lang="ja-JP" altLang="en-US" sz="1300" dirty="0">
                 <a:solidFill>
                   <a:srgbClr val="222222"/>
                 </a:solidFill>
@@ -4853,7 +4853,7 @@
               </a:rPr>
               <a:t>品番の読み違い・桁ずれが発生</a:t>
             </a:r>
-            <a:endParaRPr lang="en-US" sz="1300" dirty="0"/>
+            <a:endParaRPr lang="ja-JP" sz="1300" dirty="0"/>
           </a:p>
         </p:txBody>
       </p:sp>
@@ -4922,7 +4922,7 @@
               <a:buNone/>
             </a:pPr>
             <a:r>
-              <a:rPr lang="en-US" sz="1300" b="1" dirty="0">
+              <a:rPr lang="ja-JP" altLang="en-US" sz="1300" b="1" dirty="0">
                 <a:solidFill>
                   <a:srgbClr val="222222"/>
                 </a:solidFill>
@@ -4933,7 +4933,7 @@
               <a:t>AI-OCRで自動読み取りし、品番マスタと</a:t>
             </a:r>
             <a:br>
-              <a:rPr lang="en-US" sz="1300" b="1" dirty="0">
+              <a:rPr lang="ja-JP" altLang="en-US" sz="1300" b="1" dirty="0">
                 <a:solidFill>
                   <a:srgbClr val="222222"/>
                 </a:solidFill>
@@ -4943,7 +4943,7 @@
               </a:rPr>
             </a:br>
             <a:r>
-              <a:rPr lang="en-US" sz="1300" b="1" dirty="0">
+              <a:rPr lang="ja-JP" altLang="en-US" sz="1300" b="1" dirty="0">
                 <a:solidFill>
                   <a:srgbClr val="222222"/>
                 </a:solidFill>
@@ -4953,7 +4953,7 @@
               </a:rPr>
               <a:t>自動照合</a:t>
             </a:r>
-            <a:endParaRPr lang="en-US" sz="1300" dirty="0"/>
+            <a:endParaRPr lang="ja-JP" sz="1300" dirty="0"/>
           </a:p>
         </p:txBody>
       </p:sp>
@@ -5002,7 +5002,7 @@
               <a:buNone/>
             </a:pPr>
             <a:r>
-              <a:rPr lang="en-US" sz="1300" dirty="0">
+              <a:rPr lang="ja-JP" altLang="en-US" sz="1300" dirty="0">
                 <a:solidFill>
                   <a:srgbClr val="222222"/>
                 </a:solidFill>
@@ -5012,7 +5012,7 @@
               </a:rPr>
               <a:t>基幹システムへ手入力（1件約12分）</a:t>
             </a:r>
-            <a:endParaRPr lang="en-US" sz="1300" dirty="0"/>
+            <a:endParaRPr lang="ja-JP" sz="1300" dirty="0"/>
           </a:p>
         </p:txBody>
       </p:sp>
@@ -5081,7 +5081,7 @@
               <a:buNone/>
             </a:pPr>
             <a:r>
-              <a:rPr lang="en-US" sz="1300" dirty="0">
+              <a:rPr lang="ja-JP" altLang="en-US" sz="1300" dirty="0">
                 <a:solidFill>
                   <a:srgbClr val="222222"/>
                 </a:solidFill>
@@ -5091,7 +5091,7 @@
               </a:rPr>
               <a:t>繁忙期に処理が追いつかない</a:t>
             </a:r>
-            <a:endParaRPr lang="en-US" sz="1300" dirty="0"/>
+            <a:endParaRPr lang="ja-JP" sz="1300" dirty="0"/>
           </a:p>
         </p:txBody>
       </p:sp>
@@ -5160,7 +5160,7 @@
               <a:buNone/>
             </a:pPr>
             <a:r>
-              <a:rPr lang="en-US" sz="1300" b="1" dirty="0">
+              <a:rPr lang="ja-JP" altLang="en-US" sz="1300" b="1" dirty="0">
                 <a:solidFill>
                   <a:srgbClr val="222222"/>
                 </a:solidFill>
@@ -5170,7 +5170,7 @@
               </a:rPr>
               <a:t>読み取り結果をAPI経由で自動登録</a:t>
             </a:r>
-            <a:endParaRPr lang="en-US" sz="1300" dirty="0"/>
+            <a:endParaRPr lang="ja-JP" sz="1300" dirty="0"/>
           </a:p>
         </p:txBody>
       </p:sp>
@@ -5219,7 +5219,7 @@
               <a:buNone/>
             </a:pPr>
             <a:r>
-              <a:rPr lang="en-US" sz="1300" dirty="0">
+              <a:rPr lang="ja-JP" altLang="en-US" sz="1300" dirty="0">
                 <a:solidFill>
                   <a:srgbClr val="222222"/>
                 </a:solidFill>
@@ -5229,7 +5229,7 @@
               </a:rPr>
               <a:t>担当者がダブルチェック</a:t>
             </a:r>
-            <a:endParaRPr lang="en-US" sz="1300" dirty="0"/>
+            <a:endParaRPr lang="ja-JP" sz="1300" dirty="0"/>
           </a:p>
         </p:txBody>
       </p:sp>
@@ -5298,7 +5298,7 @@
               <a:buNone/>
             </a:pPr>
             <a:r>
-              <a:rPr lang="en-US" sz="1300" dirty="0">
+              <a:rPr lang="ja-JP" altLang="en-US" sz="1300" dirty="0">
                 <a:solidFill>
                   <a:srgbClr val="222222"/>
                 </a:solidFill>
@@ -5308,7 +5308,7 @@
               </a:rPr>
               <a:t>チェック自体が属人化</a:t>
             </a:r>
-            <a:endParaRPr lang="en-US" sz="1300" dirty="0"/>
+            <a:endParaRPr lang="ja-JP" sz="1300" dirty="0"/>
           </a:p>
         </p:txBody>
       </p:sp>
@@ -5377,7 +5377,7 @@
               <a:buNone/>
             </a:pPr>
             <a:r>
-              <a:rPr lang="en-US" sz="1300" b="1" dirty="0">
+              <a:rPr lang="ja-JP" altLang="en-US" sz="1300" b="1" dirty="0">
                 <a:solidFill>
                   <a:srgbClr val="222222"/>
                 </a:solidFill>
@@ -5387,7 +5387,7 @@
               </a:rPr>
               <a:t>差異があるものだけを担当者に通知</a:t>
             </a:r>
-            <a:endParaRPr lang="en-US" sz="1300" dirty="0"/>
+            <a:endParaRPr lang="ja-JP" sz="1300" dirty="0"/>
           </a:p>
         </p:txBody>
       </p:sp>
@@ -5494,7 +5494,7 @@
               <a:buNone/>
             </a:pPr>
             <a:r>
-              <a:rPr lang="en-US" sz="2200" b="1" dirty="0">
+              <a:rPr lang="ja-JP" altLang="en-US" sz="2200" b="1" dirty="0">
                 <a:solidFill>
                   <a:srgbClr val="1B2A49"/>
                 </a:solidFill>
@@ -5504,7 +5504,7 @@
               </a:rPr>
               <a:t>繁忙期の受注件数は通常月の1.8倍で、現体制では処理しきれない</a:t>
             </a:r>
-            <a:endParaRPr lang="en-US" sz="2200" dirty="0"/>
+            <a:endParaRPr lang="ja-JP" sz="2200" dirty="0"/>
           </a:p>
         </p:txBody>
       </p:sp>
@@ -5533,7 +5533,7 @@
               <a:buNone/>
             </a:pPr>
             <a:r>
-              <a:rPr lang="en-US" sz="900" dirty="0">
+              <a:rPr lang="ja-JP" altLang="en-US" sz="900" dirty="0">
                 <a:solidFill>
                   <a:srgbClr val="5B6770"/>
                 </a:solidFill>
@@ -5543,7 +5543,7 @@
               </a:rPr>
               <a:t>出所：基幹システムの受注データ（2026年4〜9月）</a:t>
             </a:r>
-            <a:endParaRPr lang="en-US" sz="900" dirty="0"/>
+            <a:endParaRPr lang="ja-JP" sz="900" dirty="0"/>
           </a:p>
         </p:txBody>
       </p:sp>
@@ -5588,7 +5588,7 @@
               <a:buNone/>
             </a:pPr>
             <a:r>
-              <a:rPr lang="en-US" sz="1000" dirty="0">
+              <a:rPr lang="ja-JP" altLang="en-US" sz="1000" dirty="0">
                 <a:solidFill>
                   <a:srgbClr val="5B6770"/>
                 </a:solidFill>
@@ -5598,7 +5598,7 @@
               </a:rPr>
               <a:t>（件）</a:t>
             </a:r>
-            <a:endParaRPr lang="en-US" sz="1000" dirty="0"/>
+            <a:endParaRPr lang="ja-JP" sz="1000" dirty="0"/>
           </a:p>
         </p:txBody>
       </p:sp>
@@ -5647,7 +5647,7 @@
               <a:buNone/>
             </a:pPr>
             <a:r>
-              <a:rPr lang="en-US" sz="1500" b="1" dirty="0">
+              <a:rPr lang="ja-JP" altLang="en-US" sz="1500" b="1" dirty="0">
                 <a:solidFill>
                   <a:srgbClr val="D9822B"/>
                 </a:solidFill>
@@ -5657,7 +5657,7 @@
               </a:rPr>
               <a:t>示唆</a:t>
             </a:r>
-            <a:endParaRPr lang="en-US" sz="1500" dirty="0"/>
+            <a:endParaRPr lang="ja-JP" sz="1500" dirty="0"/>
           </a:p>
         </p:txBody>
       </p:sp>
@@ -5690,7 +5690,7 @@
               <a:buChar char="•"/>
             </a:pPr>
             <a:r>
-              <a:rPr lang="en-US" sz="1500" dirty="0">
+              <a:rPr lang="ja-JP" altLang="en-US" sz="1500" dirty="0">
                 <a:solidFill>
                   <a:srgbClr val="222222"/>
                 </a:solidFill>
@@ -5700,7 +5700,7 @@
               </a:rPr>
               <a:t>7〜8月の受注は通常月の約1.8倍</a:t>
             </a:r>
-            <a:endParaRPr lang="en-US" sz="1500" dirty="0"/>
+            <a:endParaRPr lang="ja-JP" sz="1500" dirty="0"/>
           </a:p>
           <a:p>
             <a:pPr marL="342900" indent="-342900">
@@ -5711,7 +5711,7 @@
               <a:buChar char="•"/>
             </a:pPr>
             <a:r>
-              <a:rPr lang="en-US" sz="1500" dirty="0">
+              <a:rPr lang="ja-JP" altLang="en-US" sz="1500" dirty="0">
                 <a:solidFill>
                   <a:srgbClr val="222222"/>
                 </a:solidFill>
@@ -5721,7 +5721,7 @@
               </a:rPr>
               <a:t>1件18分で計算すると、繁忙月は約220時間が必要</a:t>
             </a:r>
-            <a:endParaRPr lang="en-US" sz="1500" dirty="0"/>
+            <a:endParaRPr lang="ja-JP" sz="1500" dirty="0"/>
           </a:p>
           <a:p>
             <a:pPr marL="342900" indent="-342900">
@@ -5732,7 +5732,7 @@
               <a:buChar char="•"/>
             </a:pPr>
             <a:r>
-              <a:rPr lang="en-US" sz="1500" dirty="0">
+              <a:rPr lang="ja-JP" altLang="en-US" sz="1500" dirty="0">
                 <a:solidFill>
                   <a:srgbClr val="222222"/>
                 </a:solidFill>
@@ -5743,7 +5743,7 @@
               <a:t>担当者3名の処理能力</a:t>
             </a:r>
             <a:br>
-              <a:rPr lang="en-US" sz="1500" dirty="0">
+              <a:rPr lang="ja-JP" altLang="en-US" sz="1500" dirty="0">
                 <a:solidFill>
                   <a:srgbClr val="222222"/>
                 </a:solidFill>
@@ -5753,7 +5753,7 @@
               </a:rPr>
             </a:br>
             <a:r>
-              <a:rPr lang="en-US" sz="1500" dirty="0">
+              <a:rPr lang="ja-JP" altLang="en-US" sz="1500" dirty="0">
                 <a:solidFill>
                   <a:srgbClr val="222222"/>
                 </a:solidFill>
@@ -5764,7 +5764,7 @@
               <a:t>（約150時間）を大きく</a:t>
             </a:r>
             <a:br>
-              <a:rPr lang="en-US" sz="1500" dirty="0">
+              <a:rPr lang="ja-JP" altLang="en-US" sz="1500" dirty="0">
                 <a:solidFill>
                   <a:srgbClr val="222222"/>
                 </a:solidFill>
@@ -5774,7 +5774,7 @@
               </a:rPr>
             </a:br>
             <a:r>
-              <a:rPr lang="en-US" sz="1500" dirty="0">
+              <a:rPr lang="ja-JP" altLang="en-US" sz="1500" dirty="0">
                 <a:solidFill>
                   <a:srgbClr val="222222"/>
                 </a:solidFill>
@@ -5784,7 +5784,7 @@
               </a:rPr>
               <a:t>超えている</a:t>
             </a:r>
-            <a:endParaRPr lang="en-US" sz="1500" dirty="0"/>
+            <a:endParaRPr lang="ja-JP" sz="1500" dirty="0"/>
           </a:p>
         </p:txBody>
       </p:sp>
@@ -5891,7 +5891,7 @@
               <a:buNone/>
             </a:pPr>
             <a:r>
-              <a:rPr lang="en-US" sz="2200" b="1" dirty="0">
+              <a:rPr lang="ja-JP" altLang="en-US" sz="2200" b="1" dirty="0">
                 <a:solidFill>
                   <a:srgbClr val="1B2A49"/>
                 </a:solidFill>
@@ -5901,7 +5901,7 @@
               </a:rPr>
               <a:t>3つの選択肢のうち、案Bが費用対効果と導入リスクのバランスに優れる</a:t>
             </a:r>
-            <a:endParaRPr lang="en-US" sz="2200" dirty="0"/>
+            <a:endParaRPr lang="ja-JP" sz="2200" dirty="0"/>
           </a:p>
         </p:txBody>
       </p:sp>
@@ -5930,7 +5930,7 @@
               <a:buNone/>
             </a:pPr>
             <a:r>
-              <a:rPr lang="en-US" sz="900" dirty="0">
+              <a:rPr lang="ja-JP" altLang="en-US" sz="900" dirty="0">
                 <a:solidFill>
                   <a:srgbClr val="5B6770"/>
                 </a:solidFill>
@@ -5940,7 +5940,7 @@
               </a:rPr>
               <a:t>出所：各社見積もり（2026年10月時点）をもとに作成</a:t>
             </a:r>
-            <a:endParaRPr lang="en-US" sz="900" dirty="0"/>
+            <a:endParaRPr lang="ja-JP" sz="900" dirty="0"/>
           </a:p>
         </p:txBody>
       </p:sp>
@@ -5981,7 +5981,7 @@
                       <a:pPr indent="0" marL="0">
                         <a:buNone/>
                       </a:pPr>
-                      <a:endParaRPr lang="en-US" sz="1300" dirty="0">
+                      <a:endParaRPr lang="ja-JP" sz="1300" dirty="0">
                         <a:latin typeface="Meiryo" charset="0"/>
                         <a:ea typeface="Meiryo" charset="0"/>
                         <a:cs typeface="Meiryo" charset="0"/>
@@ -6039,7 +6039,7 @@
                         <a:buNone/>
                       </a:pPr>
                       <a:r>
-                        <a:rPr lang="en-US" sz="1300" b="1" dirty="0">
+                        <a:rPr lang="ja-JP" altLang="en-US" sz="1300" b="1" dirty="0">
                           <a:solidFill>
                             <a:srgbClr val="FFFFFF"/>
                           </a:solidFill>
@@ -6049,7 +6049,7 @@
                         </a:rPr>
                         <a:t>案A：人員増強</a:t>
                       </a:r>
-                      <a:endParaRPr lang="en-US" sz="1300" dirty="0">
+                      <a:endParaRPr lang="ja-JP" sz="1300" dirty="0">
                         <a:latin typeface="Meiryo" charset="0"/>
                         <a:ea typeface="Meiryo" charset="0"/>
                         <a:cs typeface="Meiryo" charset="0"/>
@@ -6107,7 +6107,7 @@
                         <a:buNone/>
                       </a:pPr>
                       <a:r>
-                        <a:rPr lang="en-US" sz="1300" b="1" dirty="0">
+                        <a:rPr lang="ja-JP" altLang="en-US" sz="1300" b="1" dirty="0">
                           <a:solidFill>
                             <a:srgbClr val="FFFFFF"/>
                           </a:solidFill>
@@ -6117,7 +6117,7 @@
                         </a:rPr>
                         <a:t>案B：AI-OCR＋API連携</a:t>
                       </a:r>
-                      <a:endParaRPr lang="en-US" sz="1300" dirty="0">
+                      <a:endParaRPr lang="ja-JP" sz="1300" dirty="0">
                         <a:latin typeface="Meiryo" charset="0"/>
                         <a:ea typeface="Meiryo" charset="0"/>
                         <a:cs typeface="Meiryo" charset="0"/>
@@ -6175,7 +6175,7 @@
                         <a:buNone/>
                       </a:pPr>
                       <a:r>
-                        <a:rPr lang="en-US" sz="1300" b="1" dirty="0">
+                        <a:rPr lang="ja-JP" altLang="en-US" sz="1300" b="1" dirty="0">
                           <a:solidFill>
                             <a:srgbClr val="FFFFFF"/>
                           </a:solidFill>
@@ -6185,7 +6185,7 @@
                         </a:rPr>
                         <a:t>案C：基幹システム刷新</a:t>
                       </a:r>
-                      <a:endParaRPr lang="en-US" sz="1300" dirty="0">
+                      <a:endParaRPr lang="ja-JP" sz="1300" dirty="0">
                         <a:latin typeface="Meiryo" charset="0"/>
                         <a:ea typeface="Meiryo" charset="0"/>
                         <a:cs typeface="Meiryo" charset="0"/>
@@ -6245,7 +6245,7 @@
                         <a:buNone/>
                       </a:pPr>
                       <a:r>
-                        <a:rPr lang="en-US" sz="1300" b="1" dirty="0">
+                        <a:rPr lang="ja-JP" altLang="en-US" sz="1300" b="1" dirty="0">
                           <a:solidFill>
                             <a:srgbClr val="1B2A49"/>
                           </a:solidFill>
@@ -6255,7 +6255,7 @@
                         </a:rPr>
                         <a:t>初期費用</a:t>
                       </a:r>
-                      <a:endParaRPr lang="en-US" sz="1300" dirty="0">
+                      <a:endParaRPr lang="ja-JP" sz="1300" dirty="0">
                         <a:latin typeface="Meiryo" charset="0"/>
                         <a:ea typeface="Meiryo" charset="0"/>
                         <a:cs typeface="Meiryo" charset="0"/>
@@ -6313,7 +6313,7 @@
                         <a:buNone/>
                       </a:pPr>
                       <a:r>
-                        <a:rPr lang="en-US" sz="1300" dirty="0">
+                        <a:rPr lang="ja-JP" altLang="en-US" sz="1300" dirty="0">
                           <a:solidFill>
                             <a:srgbClr val="222222"/>
                           </a:solidFill>
@@ -6323,7 +6323,7 @@
                         </a:rPr>
                         <a:t>0円</a:t>
                       </a:r>
-                      <a:endParaRPr lang="en-US" sz="1300" dirty="0">
+                      <a:endParaRPr lang="ja-JP" sz="1300" dirty="0">
                         <a:latin typeface="Meiryo" charset="0"/>
                         <a:ea typeface="Meiryo" charset="0"/>
                         <a:cs typeface="Meiryo" charset="0"/>
@@ -6381,7 +6381,7 @@
                         <a:buNone/>
                       </a:pPr>
                       <a:r>
-                        <a:rPr lang="en-US" sz="1300" b="1" dirty="0">
+                        <a:rPr lang="ja-JP" altLang="en-US" sz="1300" b="1" dirty="0">
                           <a:solidFill>
                             <a:srgbClr val="222222"/>
                           </a:solidFill>
@@ -6391,7 +6391,7 @@
                         </a:rPr>
                         <a:t>480万円</a:t>
                       </a:r>
-                      <a:endParaRPr lang="en-US" sz="1300" dirty="0">
+                      <a:endParaRPr lang="ja-JP" sz="1300" dirty="0">
                         <a:latin typeface="Meiryo" charset="0"/>
                         <a:ea typeface="Meiryo" charset="0"/>
                         <a:cs typeface="Meiryo" charset="0"/>
@@ -6449,7 +6449,7 @@
                         <a:buNone/>
                       </a:pPr>
                       <a:r>
-                        <a:rPr lang="en-US" sz="1300" dirty="0">
+                        <a:rPr lang="ja-JP" altLang="en-US" sz="1300" dirty="0">
                           <a:solidFill>
                             <a:srgbClr val="222222"/>
                           </a:solidFill>
@@ -6459,7 +6459,7 @@
                         </a:rPr>
                         <a:t>3,200万円</a:t>
                       </a:r>
-                      <a:endParaRPr lang="en-US" sz="1300" dirty="0">
+                      <a:endParaRPr lang="ja-JP" sz="1300" dirty="0">
                         <a:latin typeface="Meiryo" charset="0"/>
                         <a:ea typeface="Meiryo" charset="0"/>
                         <a:cs typeface="Meiryo" charset="0"/>
@@ -6519,7 +6519,7 @@
                         <a:buNone/>
                       </a:pPr>
                       <a:r>
-                        <a:rPr lang="en-US" sz="1300" b="1" dirty="0">
+                        <a:rPr lang="ja-JP" altLang="en-US" sz="1300" b="1" dirty="0">
                           <a:solidFill>
                             <a:srgbClr val="1B2A49"/>
                           </a:solidFill>
@@ -6529,7 +6529,7 @@
                         </a:rPr>
                         <a:t>年間コスト</a:t>
                       </a:r>
-                      <a:endParaRPr lang="en-US" sz="1300" dirty="0">
+                      <a:endParaRPr lang="ja-JP" sz="1300" dirty="0">
                         <a:latin typeface="Meiryo" charset="0"/>
                         <a:ea typeface="Meiryo" charset="0"/>
                         <a:cs typeface="Meiryo" charset="0"/>
@@ -6587,7 +6587,7 @@
                         <a:buNone/>
                       </a:pPr>
                       <a:r>
-                        <a:rPr lang="en-US" sz="1300" dirty="0">
+                        <a:rPr lang="ja-JP" altLang="en-US" sz="1300" dirty="0">
                           <a:solidFill>
                             <a:srgbClr val="222222"/>
                           </a:solidFill>
@@ -6597,7 +6597,7 @@
                         </a:rPr>
                         <a:t>約900万円（2名採用）</a:t>
                       </a:r>
-                      <a:endParaRPr lang="en-US" sz="1300" dirty="0">
+                      <a:endParaRPr lang="ja-JP" sz="1300" dirty="0">
                         <a:latin typeface="Meiryo" charset="0"/>
                         <a:ea typeface="Meiryo" charset="0"/>
                         <a:cs typeface="Meiryo" charset="0"/>
@@ -6655,7 +6655,7 @@
                         <a:buNone/>
                       </a:pPr>
                       <a:r>
-                        <a:rPr lang="en-US" sz="1300" b="1" dirty="0">
+                        <a:rPr lang="ja-JP" altLang="en-US" sz="1300" b="1" dirty="0">
                           <a:solidFill>
                             <a:srgbClr val="222222"/>
                           </a:solidFill>
@@ -6665,7 +6665,7 @@
                         </a:rPr>
                         <a:t>約96万円</a:t>
                       </a:r>
-                      <a:endParaRPr lang="en-US" sz="1300" dirty="0">
+                      <a:endParaRPr lang="ja-JP" sz="1300" dirty="0">
                         <a:latin typeface="Meiryo" charset="0"/>
                         <a:ea typeface="Meiryo" charset="0"/>
                         <a:cs typeface="Meiryo" charset="0"/>
@@ -6723,7 +6723,7 @@
                         <a:buNone/>
                       </a:pPr>
                       <a:r>
-                        <a:rPr lang="en-US" sz="1300" dirty="0">
+                        <a:rPr lang="ja-JP" altLang="en-US" sz="1300" dirty="0">
                           <a:solidFill>
                             <a:srgbClr val="222222"/>
                           </a:solidFill>
@@ -6733,7 +6733,7 @@
                         </a:rPr>
                         <a:t>約360万円</a:t>
                       </a:r>
-                      <a:endParaRPr lang="en-US" sz="1300" dirty="0">
+                      <a:endParaRPr lang="ja-JP" sz="1300" dirty="0">
                         <a:latin typeface="Meiryo" charset="0"/>
                         <a:ea typeface="Meiryo" charset="0"/>
                         <a:cs typeface="Meiryo" charset="0"/>
@@ -6793,7 +6793,7 @@
                         <a:buNone/>
                       </a:pPr>
                       <a:r>
-                        <a:rPr lang="en-US" sz="1300" b="1" dirty="0">
+                        <a:rPr lang="ja-JP" altLang="en-US" sz="1300" b="1" dirty="0">
                           <a:solidFill>
                             <a:srgbClr val="1B2A49"/>
                           </a:solidFill>
@@ -6803,7 +6803,7 @@
                         </a:rPr>
                         <a:t>削減時間</a:t>
                       </a:r>
-                      <a:endParaRPr lang="en-US" sz="1300" dirty="0">
+                      <a:endParaRPr lang="ja-JP" sz="1300" dirty="0">
                         <a:latin typeface="Meiryo" charset="0"/>
                         <a:ea typeface="Meiryo" charset="0"/>
                         <a:cs typeface="Meiryo" charset="0"/>
@@ -6861,7 +6861,7 @@
                         <a:buNone/>
                       </a:pPr>
                       <a:r>
-                        <a:rPr lang="en-US" sz="1300" dirty="0">
+                        <a:rPr lang="ja-JP" altLang="en-US" sz="1300" dirty="0">
                           <a:solidFill>
                             <a:srgbClr val="222222"/>
                           </a:solidFill>
@@ -6871,7 +6871,7 @@
                         </a:rPr>
                         <a:t>—（工数は減らない）</a:t>
                       </a:r>
-                      <a:endParaRPr lang="en-US" sz="1300" dirty="0">
+                      <a:endParaRPr lang="ja-JP" sz="1300" dirty="0">
                         <a:latin typeface="Meiryo" charset="0"/>
                         <a:ea typeface="Meiryo" charset="0"/>
                         <a:cs typeface="Meiryo" charset="0"/>
@@ -6929,7 +6929,7 @@
                         <a:buNone/>
                       </a:pPr>
                       <a:r>
-                        <a:rPr lang="en-US" sz="1300" b="1" dirty="0">
+                        <a:rPr lang="ja-JP" altLang="en-US" sz="1300" b="1" dirty="0">
                           <a:solidFill>
                             <a:srgbClr val="222222"/>
                           </a:solidFill>
@@ -6939,7 +6939,7 @@
                         </a:rPr>
                         <a:t>月120時間</a:t>
                       </a:r>
-                      <a:endParaRPr lang="en-US" sz="1300" dirty="0">
+                      <a:endParaRPr lang="ja-JP" sz="1300" dirty="0">
                         <a:latin typeface="Meiryo" charset="0"/>
                         <a:ea typeface="Meiryo" charset="0"/>
                         <a:cs typeface="Meiryo" charset="0"/>
@@ -6997,7 +6997,7 @@
                         <a:buNone/>
                       </a:pPr>
                       <a:r>
-                        <a:rPr lang="en-US" sz="1300" dirty="0">
+                        <a:rPr lang="ja-JP" altLang="en-US" sz="1300" dirty="0">
                           <a:solidFill>
                             <a:srgbClr val="222222"/>
                           </a:solidFill>
@@ -7007,7 +7007,7 @@
                         </a:rPr>
                         <a:t>月140時間</a:t>
                       </a:r>
-                      <a:endParaRPr lang="en-US" sz="1300" dirty="0">
+                      <a:endParaRPr lang="ja-JP" sz="1300" dirty="0">
                         <a:latin typeface="Meiryo" charset="0"/>
                         <a:ea typeface="Meiryo" charset="0"/>
                         <a:cs typeface="Meiryo" charset="0"/>
@@ -7067,7 +7067,7 @@
                         <a:buNone/>
                       </a:pPr>
                       <a:r>
-                        <a:rPr lang="en-US" sz="1300" b="1" dirty="0">
+                        <a:rPr lang="ja-JP" altLang="en-US" sz="1300" b="1" dirty="0">
                           <a:solidFill>
                             <a:srgbClr val="1B2A49"/>
                           </a:solidFill>
@@ -7077,7 +7077,7 @@
                         </a:rPr>
                         <a:t>導入期間</a:t>
                       </a:r>
-                      <a:endParaRPr lang="en-US" sz="1300" dirty="0">
+                      <a:endParaRPr lang="ja-JP" sz="1300" dirty="0">
                         <a:latin typeface="Meiryo" charset="0"/>
                         <a:ea typeface="Meiryo" charset="0"/>
                         <a:cs typeface="Meiryo" charset="0"/>
@@ -7135,7 +7135,7 @@
                         <a:buNone/>
                       </a:pPr>
                       <a:r>
-                        <a:rPr lang="en-US" sz="1300" dirty="0">
+                        <a:rPr lang="ja-JP" altLang="en-US" sz="1300" dirty="0">
                           <a:solidFill>
                             <a:srgbClr val="222222"/>
                           </a:solidFill>
@@ -7145,7 +7145,7 @@
                         </a:rPr>
                         <a:t>2〜3か月（採用）</a:t>
                       </a:r>
-                      <a:endParaRPr lang="en-US" sz="1300" dirty="0">
+                      <a:endParaRPr lang="ja-JP" sz="1300" dirty="0">
                         <a:latin typeface="Meiryo" charset="0"/>
                         <a:ea typeface="Meiryo" charset="0"/>
                         <a:cs typeface="Meiryo" charset="0"/>
@@ -7203,7 +7203,7 @@
                         <a:buNone/>
                       </a:pPr>
                       <a:r>
-                        <a:rPr lang="en-US" sz="1300" b="1" dirty="0">
+                        <a:rPr lang="ja-JP" altLang="en-US" sz="1300" b="1" dirty="0">
                           <a:solidFill>
                             <a:srgbClr val="222222"/>
                           </a:solidFill>
@@ -7213,7 +7213,7 @@
                         </a:rPr>
                         <a:t>3か月</a:t>
                       </a:r>
-                      <a:endParaRPr lang="en-US" sz="1300" dirty="0">
+                      <a:endParaRPr lang="ja-JP" sz="1300" dirty="0">
                         <a:latin typeface="Meiryo" charset="0"/>
                         <a:ea typeface="Meiryo" charset="0"/>
                         <a:cs typeface="Meiryo" charset="0"/>
@@ -7271,7 +7271,7 @@
                         <a:buNone/>
                       </a:pPr>
                       <a:r>
-                        <a:rPr lang="en-US" sz="1300" dirty="0">
+                        <a:rPr lang="ja-JP" altLang="en-US" sz="1300" dirty="0">
                           <a:solidFill>
                             <a:srgbClr val="222222"/>
                           </a:solidFill>
@@ -7281,7 +7281,7 @@
                         </a:rPr>
                         <a:t>12〜18か月</a:t>
                       </a:r>
-                      <a:endParaRPr lang="en-US" sz="1300" dirty="0">
+                      <a:endParaRPr lang="ja-JP" sz="1300" dirty="0">
                         <a:latin typeface="Meiryo" charset="0"/>
                         <a:ea typeface="Meiryo" charset="0"/>
                         <a:cs typeface="Meiryo" charset="0"/>
@@ -7341,7 +7341,7 @@
                         <a:buNone/>
                       </a:pPr>
                       <a:r>
-                        <a:rPr lang="en-US" sz="1300" b="1" dirty="0">
+                        <a:rPr lang="ja-JP" altLang="en-US" sz="1300" b="1" dirty="0">
                           <a:solidFill>
                             <a:srgbClr val="1B2A49"/>
                           </a:solidFill>
@@ -7351,7 +7351,7 @@
                         </a:rPr>
                         <a:t>主なリスク</a:t>
                       </a:r>
-                      <a:endParaRPr lang="en-US" sz="1300" dirty="0">
+                      <a:endParaRPr lang="ja-JP" sz="1300" dirty="0">
                         <a:latin typeface="Meiryo" charset="0"/>
                         <a:ea typeface="Meiryo" charset="0"/>
                         <a:cs typeface="Meiryo" charset="0"/>
@@ -7409,7 +7409,7 @@
                         <a:buNone/>
                       </a:pPr>
                       <a:r>
-                        <a:rPr lang="en-US" sz="1300" dirty="0">
+                        <a:rPr lang="ja-JP" altLang="en-US" sz="1300" dirty="0">
                           <a:solidFill>
                             <a:srgbClr val="222222"/>
                           </a:solidFill>
@@ -7419,7 +7419,7 @@
                         </a:rPr>
                         <a:t>採用難・教育負担</a:t>
                       </a:r>
-                      <a:endParaRPr lang="en-US" sz="1300" dirty="0">
+                      <a:endParaRPr lang="ja-JP" sz="1300" dirty="0">
                         <a:latin typeface="Meiryo" charset="0"/>
                         <a:ea typeface="Meiryo" charset="0"/>
                         <a:cs typeface="Meiryo" charset="0"/>
@@ -7477,7 +7477,7 @@
                         <a:buNone/>
                       </a:pPr>
                       <a:r>
-                        <a:rPr lang="en-US" sz="1300" b="1" dirty="0">
+                        <a:rPr lang="ja-JP" altLang="en-US" sz="1300" b="1" dirty="0">
                           <a:solidFill>
                             <a:srgbClr val="222222"/>
                           </a:solidFill>
@@ -7487,7 +7487,7 @@
                         </a:rPr>
                         <a:t>読み取り精度の初期調整</a:t>
                       </a:r>
-                      <a:endParaRPr lang="en-US" sz="1300" dirty="0">
+                      <a:endParaRPr lang="ja-JP" sz="1300" dirty="0">
                         <a:latin typeface="Meiryo" charset="0"/>
                         <a:ea typeface="Meiryo" charset="0"/>
                         <a:cs typeface="Meiryo" charset="0"/>
@@ -7545,7 +7545,7 @@
                         <a:buNone/>
                       </a:pPr>
                       <a:r>
-                        <a:rPr lang="en-US" sz="1300" dirty="0">
+                        <a:rPr lang="ja-JP" altLang="en-US" sz="1300" dirty="0">
                           <a:solidFill>
                             <a:srgbClr val="222222"/>
                           </a:solidFill>
@@ -7555,7 +7555,7 @@
                         </a:rPr>
                         <a:t>長期化・現場の混乱</a:t>
                       </a:r>
-                      <a:endParaRPr lang="en-US" sz="1300" dirty="0">
+                      <a:endParaRPr lang="ja-JP" sz="1300" dirty="0">
                         <a:latin typeface="Meiryo" charset="0"/>
                         <a:ea typeface="Meiryo" charset="0"/>
                         <a:cs typeface="Meiryo" charset="0"/>
@@ -7712,7 +7712,7 @@
               <a:buNone/>
             </a:pPr>
             <a:r>
-              <a:rPr lang="en-US" sz="2200" b="1" dirty="0">
+              <a:rPr lang="ja-JP" altLang="en-US" sz="2200" b="1" dirty="0">
                 <a:solidFill>
                   <a:srgbClr val="1B2A49"/>
                 </a:solidFill>
@@ -7722,7 +7722,7 @@
               </a:rPr>
               <a:t>導入後12か月で、時間・品質・費用のすべてに効果が出る</a:t>
             </a:r>
-            <a:endParaRPr lang="en-US" sz="2200" dirty="0"/>
+            <a:endParaRPr lang="ja-JP" sz="2200" dirty="0"/>
           </a:p>
         </p:txBody>
       </p:sp>
@@ -7771,7 +7771,7 @@
               <a:buNone/>
             </a:pPr>
             <a:r>
-              <a:rPr lang="en-US" sz="1600" b="1" dirty="0">
+              <a:rPr lang="ja-JP" altLang="en-US" sz="1600" b="1" dirty="0">
                 <a:solidFill>
                   <a:srgbClr val="D9822B"/>
                 </a:solidFill>
@@ -7785,7 +7785,7 @@
               <a:buNone/>
             </a:pPr>
             <a:r>
-              <a:rPr lang="en-US" sz="1600" b="1" dirty="0">
+              <a:rPr lang="ja-JP" altLang="en-US" sz="1600" b="1" dirty="0">
                 <a:solidFill>
                   <a:srgbClr val="1B2A49"/>
                 </a:solidFill>
@@ -7795,7 +7795,7 @@
               </a:rPr>
               <a:t>初期投資480万円は、約7か月で回収できる</a:t>
             </a:r>
-            <a:endParaRPr lang="en-US" sz="1600" dirty="0"/>
+            <a:endParaRPr lang="ja-JP" sz="1600" dirty="0"/>
           </a:p>
         </p:txBody>
       </p:sp>
@@ -7824,7 +7824,7 @@
               <a:buNone/>
             </a:pPr>
             <a:r>
-              <a:rPr lang="en-US" sz="900" dirty="0">
+              <a:rPr lang="ja-JP" altLang="en-US" sz="900" dirty="0">
                 <a:solidFill>
                   <a:srgbClr val="5B6770"/>
                 </a:solidFill>
@@ -7834,7 +7834,7 @@
               </a:rPr>
               <a:t>出所：当社試算（人件費は時給換算3,000円で計算）</a:t>
             </a:r>
-            <a:endParaRPr lang="en-US" sz="900" dirty="0"/>
+            <a:endParaRPr lang="ja-JP" sz="900" dirty="0"/>
           </a:p>
         </p:txBody>
       </p:sp>
@@ -7883,7 +7883,7 @@
               <a:buNone/>
             </a:pPr>
             <a:r>
-              <a:rPr lang="en-US" sz="1500" b="1" dirty="0">
+              <a:rPr lang="ja-JP" altLang="en-US" sz="1500" b="1" dirty="0">
                 <a:solidFill>
                   <a:srgbClr val="1B2A49"/>
                 </a:solidFill>
@@ -7893,7 +7893,7 @@
               </a:rPr>
               <a:t>削減できる作業時間</a:t>
             </a:r>
-            <a:endParaRPr lang="en-US" sz="1500" dirty="0"/>
+            <a:endParaRPr lang="ja-JP" sz="1500" dirty="0"/>
           </a:p>
         </p:txBody>
       </p:sp>
@@ -7905,8 +7905,8 @@
         </p:nvSpPr>
         <p:spPr>
           <a:xfrm>
-            <a:off x="731520" y="2377440"/>
-            <a:ext cx="3027578" cy="1097280"/>
+            <a:off x="731520" y="2331720"/>
+            <a:ext cx="3027578" cy="1280160"/>
           </a:xfrm>
           <a:prstGeom prst="rect">
             <a:avLst/>
@@ -7922,7 +7922,7 @@
               <a:buNone/>
             </a:pPr>
             <a:r>
-              <a:rPr lang="en-US" sz="5400" b="1" dirty="0">
+              <a:rPr lang="ja-JP" altLang="en-US" sz="5400" b="1" dirty="0">
                 <a:solidFill>
                   <a:srgbClr val="D9822B"/>
                 </a:solidFill>
@@ -7936,7 +7936,7 @@
               <a:buNone/>
             </a:pPr>
             <a:r>
-              <a:rPr lang="en-US" sz="2000" b="1" dirty="0">
+              <a:rPr lang="ja-JP" altLang="en-US" sz="2000" b="1" dirty="0">
                 <a:solidFill>
                   <a:srgbClr val="D9822B"/>
                 </a:solidFill>
@@ -7946,7 +7946,7 @@
               </a:rPr>
               <a:t> 時間/月</a:t>
             </a:r>
-            <a:endParaRPr lang="en-US" sz="5400" dirty="0"/>
+            <a:endParaRPr lang="ja-JP" sz="5400" dirty="0"/>
           </a:p>
         </p:txBody>
       </p:sp>
@@ -7975,7 +7975,7 @@
               <a:buNone/>
             </a:pPr>
             <a:r>
-              <a:rPr lang="en-US" sz="1300" dirty="0">
+              <a:rPr lang="ja-JP" altLang="en-US" sz="1300" dirty="0">
                 <a:solidFill>
                   <a:srgbClr val="222222"/>
                 </a:solidFill>
@@ -7986,7 +7986,7 @@
               <a:t>受注処理の約7割を自動化。担当者は</a:t>
             </a:r>
             <a:br>
-              <a:rPr lang="en-US" sz="1300" dirty="0">
+              <a:rPr lang="ja-JP" altLang="en-US" sz="1300" dirty="0">
                 <a:solidFill>
                   <a:srgbClr val="222222"/>
                 </a:solidFill>
@@ -7996,7 +7996,7 @@
               </a:rPr>
             </a:br>
             <a:r>
-              <a:rPr lang="en-US" sz="1300" dirty="0">
+              <a:rPr lang="ja-JP" altLang="en-US" sz="1300" dirty="0">
                 <a:solidFill>
                   <a:srgbClr val="222222"/>
                 </a:solidFill>
@@ -8006,7 +8006,7 @@
               </a:rPr>
               <a:t>例外処理と顧客対応に集中できる</a:t>
             </a:r>
-            <a:endParaRPr lang="en-US" sz="1300" dirty="0"/>
+            <a:endParaRPr lang="ja-JP" sz="1300" dirty="0"/>
           </a:p>
         </p:txBody>
       </p:sp>
@@ -8055,7 +8055,7 @@
               <a:buNone/>
             </a:pPr>
             <a:r>
-              <a:rPr lang="en-US" sz="1500" b="1" dirty="0">
+              <a:rPr lang="ja-JP" altLang="en-US" sz="1500" b="1" dirty="0">
                 <a:solidFill>
                   <a:srgbClr val="1B2A49"/>
                 </a:solidFill>
@@ -8065,7 +8065,7 @@
               </a:rPr>
               <a:t>誤出荷</a:t>
             </a:r>
-            <a:endParaRPr lang="en-US" sz="1500" dirty="0"/>
+            <a:endParaRPr lang="ja-JP" sz="1500" dirty="0"/>
           </a:p>
         </p:txBody>
       </p:sp>
@@ -8077,8 +8077,8 @@
         </p:nvSpPr>
         <p:spPr>
           <a:xfrm>
-            <a:off x="4582058" y="2377440"/>
-            <a:ext cx="3027578" cy="1097280"/>
+            <a:off x="4582058" y="2331720"/>
+            <a:ext cx="3027578" cy="1280160"/>
           </a:xfrm>
           <a:prstGeom prst="rect">
             <a:avLst/>
@@ -8094,7 +8094,7 @@
               <a:buNone/>
             </a:pPr>
             <a:r>
-              <a:rPr lang="en-US" sz="5400" b="1" dirty="0">
+              <a:rPr lang="ja-JP" altLang="en-US" sz="5400" b="1" dirty="0">
                 <a:solidFill>
                   <a:srgbClr val="D9822B"/>
                 </a:solidFill>
@@ -8108,7 +8108,7 @@
               <a:buNone/>
             </a:pPr>
             <a:r>
-              <a:rPr lang="en-US" sz="2000" b="1" dirty="0">
+              <a:rPr lang="ja-JP" altLang="en-US" sz="2000" b="1" dirty="0">
                 <a:solidFill>
                   <a:srgbClr val="D9822B"/>
                 </a:solidFill>
@@ -8118,7 +8118,7 @@
               </a:rPr>
               <a:t> 件/月</a:t>
             </a:r>
-            <a:endParaRPr lang="en-US" sz="5400" dirty="0"/>
+            <a:endParaRPr lang="ja-JP" sz="5400" dirty="0"/>
           </a:p>
         </p:txBody>
       </p:sp>
@@ -8147,7 +8147,7 @@
               <a:buNone/>
             </a:pPr>
             <a:r>
-              <a:rPr lang="en-US" sz="1300" dirty="0">
+              <a:rPr lang="ja-JP" altLang="en-US" sz="1300" dirty="0">
                 <a:solidFill>
                   <a:srgbClr val="222222"/>
                 </a:solidFill>
@@ -8158,7 +8158,7 @@
               <a:t>現状は月平均6件。品番マスタとの</a:t>
             </a:r>
             <a:br>
-              <a:rPr lang="en-US" sz="1300" dirty="0">
+              <a:rPr lang="ja-JP" altLang="en-US" sz="1300" dirty="0">
                 <a:solidFill>
                   <a:srgbClr val="222222"/>
                 </a:solidFill>
@@ -8168,7 +8168,7 @@
               </a:rPr>
             </a:br>
             <a:r>
-              <a:rPr lang="en-US" sz="1300" dirty="0">
+              <a:rPr lang="ja-JP" altLang="en-US" sz="1300" dirty="0">
                 <a:solidFill>
                   <a:srgbClr val="222222"/>
                 </a:solidFill>
@@ -8178,7 +8178,7 @@
               </a:rPr>
               <a:t>自動照合で転記ミスを防ぐ</a:t>
             </a:r>
-            <a:endParaRPr lang="en-US" sz="1300" dirty="0"/>
+            <a:endParaRPr lang="ja-JP" sz="1300" dirty="0"/>
           </a:p>
         </p:txBody>
       </p:sp>
@@ -8227,7 +8227,7 @@
               <a:buNone/>
             </a:pPr>
             <a:r>
-              <a:rPr lang="en-US" sz="1500" b="1" dirty="0">
+              <a:rPr lang="ja-JP" altLang="en-US" sz="1500" b="1" dirty="0">
                 <a:solidFill>
                   <a:srgbClr val="1B2A49"/>
                 </a:solidFill>
@@ -8237,7 +8237,7 @@
               </a:rPr>
               <a:t>投資回収期間</a:t>
             </a:r>
-            <a:endParaRPr lang="en-US" sz="1500" dirty="0"/>
+            <a:endParaRPr lang="ja-JP" sz="1500" dirty="0"/>
           </a:p>
         </p:txBody>
       </p:sp>
@@ -8249,8 +8249,8 @@
         </p:nvSpPr>
         <p:spPr>
           <a:xfrm>
-            <a:off x="8432597" y="2377440"/>
-            <a:ext cx="3027578" cy="1097280"/>
+            <a:off x="8432597" y="2331720"/>
+            <a:ext cx="3027578" cy="1280160"/>
           </a:xfrm>
           <a:prstGeom prst="rect">
             <a:avLst/>
@@ -8266,7 +8266,7 @@
               <a:buNone/>
             </a:pPr>
             <a:r>
-              <a:rPr lang="en-US" sz="5400" b="1" dirty="0">
+              <a:rPr lang="ja-JP" altLang="en-US" sz="5400" b="1" dirty="0">
                 <a:solidFill>
                   <a:srgbClr val="D9822B"/>
                 </a:solidFill>
@@ -8280,7 +8280,7 @@
               <a:buNone/>
             </a:pPr>
             <a:r>
-              <a:rPr lang="en-US" sz="2000" b="1" dirty="0">
+              <a:rPr lang="ja-JP" altLang="en-US" sz="2000" b="1" dirty="0">
                 <a:solidFill>
                   <a:srgbClr val="D9822B"/>
                 </a:solidFill>
@@ -8290,7 +8290,7 @@
               </a:rPr>
               <a:t> か月</a:t>
             </a:r>
-            <a:endParaRPr lang="en-US" sz="5400" dirty="0"/>
+            <a:endParaRPr lang="ja-JP" sz="5400" dirty="0"/>
           </a:p>
         </p:txBody>
       </p:sp>
@@ -8319,7 +8319,7 @@
               <a:buNone/>
             </a:pPr>
             <a:r>
-              <a:rPr lang="en-US" sz="1300" dirty="0">
+              <a:rPr lang="ja-JP" altLang="en-US" sz="1300" dirty="0">
                 <a:solidFill>
                   <a:srgbClr val="222222"/>
                 </a:solidFill>
@@ -8330,7 +8330,7 @@
               <a:t>初期費用480万円に対し、</a:t>
             </a:r>
             <a:br>
-              <a:rPr lang="en-US" sz="1300" dirty="0">
+              <a:rPr lang="ja-JP" altLang="en-US" sz="1300" dirty="0">
                 <a:solidFill>
                   <a:srgbClr val="222222"/>
                 </a:solidFill>
@@ -8340,7 +8340,7 @@
               </a:rPr>
             </a:br>
             <a:r>
-              <a:rPr lang="en-US" sz="1300" dirty="0">
+              <a:rPr lang="ja-JP" altLang="en-US" sz="1300" dirty="0">
                 <a:solidFill>
                   <a:srgbClr val="222222"/>
                 </a:solidFill>
@@ -8350,7 +8350,7 @@
               </a:rPr>
               <a:t>年間約860万円の削減効果</a:t>
             </a:r>
-            <a:endParaRPr lang="en-US" sz="1300" dirty="0"/>
+            <a:endParaRPr lang="ja-JP" sz="1300" dirty="0"/>
           </a:p>
         </p:txBody>
       </p:sp>
@@ -8457,7 +8457,7 @@
               <a:buNone/>
             </a:pPr>
             <a:r>
-              <a:rPr lang="en-US" sz="2200" b="1" dirty="0">
+              <a:rPr lang="ja-JP" altLang="en-US" sz="2200" b="1" dirty="0">
                 <a:solidFill>
                   <a:srgbClr val="1B2A49"/>
                 </a:solidFill>
@@ -8467,7 +8467,7 @@
               </a:rPr>
               <a:t>まずは「効果が大きく、すぐ始められる」受注処理から着手する</a:t>
             </a:r>
-            <a:endParaRPr lang="en-US" sz="2200" dirty="0"/>
+            <a:endParaRPr lang="ja-JP" sz="2200" dirty="0"/>
           </a:p>
         </p:txBody>
       </p:sp>
@@ -8519,7 +8519,7 @@
               <a:buNone/>
             </a:pPr>
             <a:r>
-              <a:rPr lang="en-US" sz="1700" b="1" dirty="0">
+              <a:rPr lang="ja-JP" altLang="en-US" sz="1700" b="1" dirty="0">
                 <a:solidFill>
                   <a:srgbClr val="1B2A49"/>
                 </a:solidFill>
@@ -8529,7 +8529,7 @@
               </a:rPr>
               <a:t>在庫引当の自動化</a:t>
             </a:r>
-            <a:endParaRPr lang="en-US" sz="1700" dirty="0"/>
+            <a:endParaRPr lang="ja-JP" sz="1700" dirty="0"/>
           </a:p>
           <a:p>
             <a:pPr indent="0" marL="0">
@@ -8539,7 +8539,7 @@
               <a:buNone/>
             </a:pPr>
             <a:r>
-              <a:rPr lang="en-US" sz="1300" dirty="0">
+              <a:rPr lang="ja-JP" altLang="en-US" sz="1300" dirty="0">
                 <a:solidFill>
                   <a:srgbClr val="222222"/>
                 </a:solidFill>
@@ -8549,7 +8549,7 @@
               </a:rPr>
               <a:t>効果は大きいが、在庫データの整備が先に必要</a:t>
             </a:r>
-            <a:endParaRPr lang="en-US" sz="1700" dirty="0"/>
+            <a:endParaRPr lang="ja-JP" sz="1700" dirty="0"/>
           </a:p>
         </p:txBody>
       </p:sp>
@@ -8601,7 +8601,7 @@
               <a:buNone/>
             </a:pPr>
             <a:r>
-              <a:rPr lang="en-US" sz="1700" b="1" dirty="0">
+              <a:rPr lang="ja-JP" altLang="en-US" sz="1700" b="1" dirty="0">
                 <a:solidFill>
                   <a:srgbClr val="D9822B"/>
                 </a:solidFill>
@@ -8611,7 +8611,7 @@
               </a:rPr>
               <a:t>受注処理の自動化（今回の提案）</a:t>
             </a:r>
-            <a:endParaRPr lang="en-US" sz="1700" dirty="0"/>
+            <a:endParaRPr lang="ja-JP" sz="1700" dirty="0"/>
           </a:p>
           <a:p>
             <a:pPr indent="0" marL="0">
@@ -8621,7 +8621,7 @@
               <a:buNone/>
             </a:pPr>
             <a:r>
-              <a:rPr lang="en-US" sz="1300" dirty="0">
+              <a:rPr lang="ja-JP" altLang="en-US" sz="1300" dirty="0">
                 <a:solidFill>
                   <a:srgbClr val="222222"/>
                 </a:solidFill>
@@ -8631,7 +8631,7 @@
               </a:rPr>
               <a:t>効果が大きく、既存システムのAPIですぐ始められる</a:t>
             </a:r>
-            <a:endParaRPr lang="en-US" sz="1700" dirty="0"/>
+            <a:endParaRPr lang="ja-JP" sz="1700" dirty="0"/>
           </a:p>
         </p:txBody>
       </p:sp>
@@ -8683,7 +8683,7 @@
               <a:buNone/>
             </a:pPr>
             <a:r>
-              <a:rPr lang="en-US" sz="1700" b="1" dirty="0">
+              <a:rPr lang="ja-JP" altLang="en-US" sz="1700" b="1" dirty="0">
                 <a:solidFill>
                   <a:srgbClr val="1B2A49"/>
                 </a:solidFill>
@@ -8693,7 +8693,7 @@
               </a:rPr>
               <a:t>請求書発行の電子化</a:t>
             </a:r>
-            <a:endParaRPr lang="en-US" sz="1700" dirty="0"/>
+            <a:endParaRPr lang="ja-JP" sz="1700" dirty="0"/>
           </a:p>
           <a:p>
             <a:pPr indent="0" marL="0">
@@ -8703,7 +8703,7 @@
               <a:buNone/>
             </a:pPr>
             <a:r>
-              <a:rPr lang="en-US" sz="1300" dirty="0">
+              <a:rPr lang="ja-JP" altLang="en-US" sz="1300" dirty="0">
                 <a:solidFill>
                   <a:srgbClr val="222222"/>
                 </a:solidFill>
@@ -8713,7 +8713,7 @@
               </a:rPr>
               <a:t>効果は限定的。受注処理の後に検討</a:t>
             </a:r>
-            <a:endParaRPr lang="en-US" sz="1700" dirty="0"/>
+            <a:endParaRPr lang="ja-JP" sz="1700" dirty="0"/>
           </a:p>
         </p:txBody>
       </p:sp>
@@ -8765,7 +8765,7 @@
               <a:buNone/>
             </a:pPr>
             <a:r>
-              <a:rPr lang="en-US" sz="1700" b="1" dirty="0">
+              <a:rPr lang="ja-JP" altLang="en-US" sz="1700" b="1" dirty="0">
                 <a:solidFill>
                   <a:srgbClr val="1B2A49"/>
                 </a:solidFill>
@@ -8775,7 +8775,7 @@
               </a:rPr>
               <a:t>日報のデジタル化</a:t>
             </a:r>
-            <a:endParaRPr lang="en-US" sz="1700" dirty="0"/>
+            <a:endParaRPr lang="ja-JP" sz="1700" dirty="0"/>
           </a:p>
           <a:p>
             <a:pPr indent="0" marL="0">
@@ -8785,7 +8785,7 @@
               <a:buNone/>
             </a:pPr>
             <a:r>
-              <a:rPr lang="en-US" sz="1300" dirty="0">
+              <a:rPr lang="ja-JP" altLang="en-US" sz="1300" dirty="0">
                 <a:solidFill>
                   <a:srgbClr val="222222"/>
                 </a:solidFill>
@@ -8795,7 +8795,7 @@
               </a:rPr>
               <a:t>すぐ始められるが、削減効果は小さい</a:t>
             </a:r>
-            <a:endParaRPr lang="en-US" sz="1700" dirty="0"/>
+            <a:endParaRPr lang="ja-JP" sz="1700" dirty="0"/>
           </a:p>
         </p:txBody>
       </p:sp>
@@ -8872,7 +8872,7 @@
               <a:buNone/>
             </a:pPr>
             <a:r>
-              <a:rPr lang="en-US" sz="1200" dirty="0">
+              <a:rPr lang="ja-JP" altLang="en-US" sz="1200" dirty="0">
                 <a:solidFill>
                   <a:srgbClr val="5B6770"/>
                 </a:solidFill>
@@ -8882,7 +8882,7 @@
               </a:rPr>
               <a:t>効果の大きさ</a:t>
             </a:r>
-            <a:endParaRPr lang="en-US" sz="1200" dirty="0"/>
+            <a:endParaRPr lang="ja-JP" sz="1200" dirty="0"/>
           </a:p>
         </p:txBody>
       </p:sp>
@@ -8911,7 +8911,7 @@
               <a:buNone/>
             </a:pPr>
             <a:r>
-              <a:rPr lang="en-US" sz="1200" dirty="0">
+              <a:rPr lang="ja-JP" altLang="en-US" sz="1200" dirty="0">
                 <a:solidFill>
                   <a:srgbClr val="5B6770"/>
                 </a:solidFill>
@@ -8921,7 +8921,7 @@
               </a:rPr>
               <a:t>導入のしやすさ</a:t>
             </a:r>
-            <a:endParaRPr lang="en-US" sz="1200" dirty="0"/>
+            <a:endParaRPr lang="ja-JP" sz="1200" dirty="0"/>
           </a:p>
         </p:txBody>
       </p:sp>
@@ -9028,7 +9028,7 @@
               <a:buNone/>
             </a:pPr>
             <a:r>
-              <a:rPr lang="en-US" sz="2200" b="1" dirty="0">
+              <a:rPr lang="ja-JP" altLang="en-US" sz="2200" b="1" dirty="0">
                 <a:solidFill>
                   <a:srgbClr val="1B2A49"/>
                 </a:solidFill>
@@ -9038,7 +9038,7 @@
               </a:rPr>
               <a:t>3か月で本番稼働し、4か月目から効果測定に入る</a:t>
             </a:r>
-            <a:endParaRPr lang="en-US" sz="2200" dirty="0"/>
+            <a:endParaRPr lang="ja-JP" sz="2200" dirty="0"/>
           </a:p>
         </p:txBody>
       </p:sp>
@@ -9087,7 +9087,7 @@
               <a:buNone/>
             </a:pPr>
             <a:r>
-              <a:rPr lang="en-US" sz="1300" b="1" dirty="0">
+              <a:rPr lang="ja-JP" altLang="en-US" sz="1300" b="1" dirty="0">
                 <a:solidFill>
                   <a:srgbClr val="FFFFFF"/>
                 </a:solidFill>
@@ -9097,7 +9097,7 @@
               </a:rPr>
               <a:t>11月</a:t>
             </a:r>
-            <a:endParaRPr lang="en-US" sz="1300" dirty="0"/>
+            <a:endParaRPr lang="ja-JP" sz="1300" dirty="0"/>
           </a:p>
         </p:txBody>
       </p:sp>
@@ -9146,7 +9146,7 @@
               <a:buNone/>
             </a:pPr>
             <a:r>
-              <a:rPr lang="en-US" sz="1300" b="1" dirty="0">
+              <a:rPr lang="ja-JP" altLang="en-US" sz="1300" b="1" dirty="0">
                 <a:solidFill>
                   <a:srgbClr val="FFFFFF"/>
                 </a:solidFill>
@@ -9156,7 +9156,7 @@
               </a:rPr>
               <a:t>12月</a:t>
             </a:r>
-            <a:endParaRPr lang="en-US" sz="1300" dirty="0"/>
+            <a:endParaRPr lang="ja-JP" sz="1300" dirty="0"/>
           </a:p>
         </p:txBody>
       </p:sp>
@@ -9205,7 +9205,7 @@
               <a:buNone/>
             </a:pPr>
             <a:r>
-              <a:rPr lang="en-US" sz="1300" b="1" dirty="0">
+              <a:rPr lang="ja-JP" altLang="en-US" sz="1300" b="1" dirty="0">
                 <a:solidFill>
                   <a:srgbClr val="FFFFFF"/>
                 </a:solidFill>
@@ -9215,7 +9215,7 @@
               </a:rPr>
               <a:t>1月</a:t>
             </a:r>
-            <a:endParaRPr lang="en-US" sz="1300" dirty="0"/>
+            <a:endParaRPr lang="ja-JP" sz="1300" dirty="0"/>
           </a:p>
         </p:txBody>
       </p:sp>
@@ -9264,7 +9264,7 @@
               <a:buNone/>
             </a:pPr>
             <a:r>
-              <a:rPr lang="en-US" sz="1300" b="1" dirty="0">
+              <a:rPr lang="ja-JP" altLang="en-US" sz="1300" b="1" dirty="0">
                 <a:solidFill>
                   <a:srgbClr val="FFFFFF"/>
                 </a:solidFill>
@@ -9274,7 +9274,7 @@
               </a:rPr>
               <a:t>2月</a:t>
             </a:r>
-            <a:endParaRPr lang="en-US" sz="1300" dirty="0"/>
+            <a:endParaRPr lang="ja-JP" sz="1300" dirty="0"/>
           </a:p>
         </p:txBody>
       </p:sp>
@@ -9323,7 +9323,7 @@
               <a:buNone/>
             </a:pPr>
             <a:r>
-              <a:rPr lang="en-US" sz="1300" b="1" dirty="0">
+              <a:rPr lang="ja-JP" altLang="en-US" sz="1300" b="1" dirty="0">
                 <a:solidFill>
                   <a:srgbClr val="FFFFFF"/>
                 </a:solidFill>
@@ -9333,7 +9333,7 @@
               </a:rPr>
               <a:t>3月</a:t>
             </a:r>
-            <a:endParaRPr lang="en-US" sz="1300" dirty="0"/>
+            <a:endParaRPr lang="ja-JP" sz="1300" dirty="0"/>
           </a:p>
         </p:txBody>
       </p:sp>
@@ -9385,7 +9385,7 @@
               <a:buNone/>
             </a:pPr>
             <a:r>
-              <a:rPr lang="en-US" sz="1300" b="1" dirty="0">
+              <a:rPr lang="ja-JP" altLang="en-US" sz="1300" b="1" dirty="0">
                 <a:solidFill>
                   <a:srgbClr val="1B2A49"/>
                 </a:solidFill>
@@ -9395,7 +9395,7 @@
               </a:rPr>
               <a:t>要件整理</a:t>
             </a:r>
-            <a:endParaRPr lang="en-US" sz="1300" dirty="0"/>
+            <a:endParaRPr lang="ja-JP" sz="1300" dirty="0"/>
           </a:p>
         </p:txBody>
       </p:sp>
@@ -9446,7 +9446,7 @@
               <a:buNone/>
             </a:pPr>
             <a:r>
-              <a:rPr lang="en-US" sz="1200" dirty="0">
+              <a:rPr lang="ja-JP" altLang="en-US" sz="1200" dirty="0">
                 <a:solidFill>
                   <a:srgbClr val="222222"/>
                 </a:solidFill>
@@ -9457,7 +9457,7 @@
               <a:t>業務フロー確認・</a:t>
             </a:r>
             <a:br>
-              <a:rPr lang="en-US" sz="1200" dirty="0">
+              <a:rPr lang="ja-JP" altLang="en-US" sz="1200" dirty="0">
                 <a:solidFill>
                   <a:srgbClr val="222222"/>
                 </a:solidFill>
@@ -9467,7 +9467,7 @@
               </a:rPr>
             </a:br>
             <a:r>
-              <a:rPr lang="en-US" sz="1200" dirty="0">
+              <a:rPr lang="ja-JP" altLang="en-US" sz="1200" dirty="0">
                 <a:solidFill>
                   <a:srgbClr val="222222"/>
                 </a:solidFill>
@@ -9477,7 +9477,7 @@
               </a:rPr>
               <a:t>帳票収集</a:t>
             </a:r>
-            <a:endParaRPr lang="en-US" sz="1200" dirty="0"/>
+            <a:endParaRPr lang="ja-JP" sz="1200" dirty="0"/>
           </a:p>
         </p:txBody>
       </p:sp>
@@ -9529,7 +9529,7 @@
               <a:buNone/>
             </a:pPr>
             <a:r>
-              <a:rPr lang="en-US" sz="1300" b="1" dirty="0">
+              <a:rPr lang="ja-JP" altLang="en-US" sz="1300" b="1" dirty="0">
                 <a:solidFill>
                   <a:srgbClr val="1B2A49"/>
                 </a:solidFill>
@@ -9539,7 +9539,7 @@
               </a:rPr>
               <a:t>開発・設定</a:t>
             </a:r>
-            <a:endParaRPr lang="en-US" sz="1300" dirty="0"/>
+            <a:endParaRPr lang="ja-JP" sz="1300" dirty="0"/>
           </a:p>
         </p:txBody>
       </p:sp>
@@ -9590,7 +9590,7 @@
               <a:buNone/>
             </a:pPr>
             <a:r>
-              <a:rPr lang="en-US" sz="1200" dirty="0">
+              <a:rPr lang="ja-JP" altLang="en-US" sz="1200" dirty="0">
                 <a:solidFill>
                   <a:srgbClr val="222222"/>
                 </a:solidFill>
@@ -9600,7 +9600,7 @@
               </a:rPr>
               <a:t>AI-OCR設定</a:t>
             </a:r>
-            <a:endParaRPr lang="en-US" sz="1200" dirty="0"/>
+            <a:endParaRPr lang="ja-JP" sz="1200" dirty="0"/>
           </a:p>
         </p:txBody>
       </p:sp>
@@ -9651,7 +9651,7 @@
               <a:buNone/>
             </a:pPr>
             <a:r>
-              <a:rPr lang="en-US" sz="1200" dirty="0">
+              <a:rPr lang="ja-JP" altLang="en-US" sz="1200" dirty="0">
                 <a:solidFill>
                   <a:srgbClr val="222222"/>
                 </a:solidFill>
@@ -9661,7 +9661,7 @@
               </a:rPr>
               <a:t>API連携開発</a:t>
             </a:r>
-            <a:endParaRPr lang="en-US" sz="1200" dirty="0"/>
+            <a:endParaRPr lang="ja-JP" sz="1200" dirty="0"/>
           </a:p>
         </p:txBody>
       </p:sp>
@@ -9713,7 +9713,7 @@
               <a:buNone/>
             </a:pPr>
             <a:r>
-              <a:rPr lang="en-US" sz="1300" b="1" dirty="0">
+              <a:rPr lang="ja-JP" altLang="en-US" sz="1300" b="1" dirty="0">
                 <a:solidFill>
                   <a:srgbClr val="1B2A49"/>
                 </a:solidFill>
@@ -9723,7 +9723,7 @@
               </a:rPr>
               <a:t>テスト</a:t>
             </a:r>
-            <a:endParaRPr lang="en-US" sz="1300" dirty="0"/>
+            <a:endParaRPr lang="ja-JP" sz="1300" dirty="0"/>
           </a:p>
         </p:txBody>
       </p:sp>
@@ -9774,7 +9774,7 @@
               <a:buNone/>
             </a:pPr>
             <a:r>
-              <a:rPr lang="en-US" sz="1200" dirty="0">
+              <a:rPr lang="ja-JP" altLang="en-US" sz="1200" dirty="0">
                 <a:solidFill>
                   <a:srgbClr val="222222"/>
                 </a:solidFill>
@@ -9784,7 +9784,7 @@
               </a:rPr>
               <a:t>並行稼働テスト</a:t>
             </a:r>
-            <a:endParaRPr lang="en-US" sz="1200" dirty="0"/>
+            <a:endParaRPr lang="ja-JP" sz="1200" dirty="0"/>
           </a:p>
         </p:txBody>
       </p:sp>
@@ -9836,7 +9836,7 @@
               <a:buNone/>
             </a:pPr>
             <a:r>
-              <a:rPr lang="en-US" sz="1300" b="1" dirty="0">
+              <a:rPr lang="ja-JP" altLang="en-US" sz="1300" b="1" dirty="0">
                 <a:solidFill>
                   <a:srgbClr val="1B2A49"/>
                 </a:solidFill>
@@ -9846,7 +9846,7 @@
               </a:rPr>
               <a:t>本番稼働</a:t>
             </a:r>
-            <a:endParaRPr lang="en-US" sz="1300" dirty="0"/>
+            <a:endParaRPr lang="ja-JP" sz="1300" dirty="0"/>
           </a:p>
         </p:txBody>
       </p:sp>
@@ -9897,7 +9897,7 @@
               <a:buNone/>
             </a:pPr>
             <a:r>
-              <a:rPr lang="en-US" sz="1200" b="1" dirty="0">
+              <a:rPr lang="ja-JP" altLang="en-US" sz="1200" b="1" dirty="0">
                 <a:solidFill>
                   <a:srgbClr val="FFFFFF"/>
                 </a:solidFill>
@@ -9907,7 +9907,7 @@
               </a:rPr>
               <a:t>本番稼働</a:t>
             </a:r>
-            <a:endParaRPr lang="en-US" sz="1200" dirty="0"/>
+            <a:endParaRPr lang="ja-JP" sz="1200" dirty="0"/>
           </a:p>
         </p:txBody>
       </p:sp>
@@ -9958,7 +9958,7 @@
               <a:buNone/>
             </a:pPr>
             <a:r>
-              <a:rPr lang="en-US" sz="1200" dirty="0">
+              <a:rPr lang="ja-JP" altLang="en-US" sz="1200" dirty="0">
                 <a:solidFill>
                   <a:srgbClr val="222222"/>
                 </a:solidFill>
@@ -9968,7 +9968,7 @@
               </a:rPr>
               <a:t>効果測定・改善</a:t>
             </a:r>
-            <a:endParaRPr lang="en-US" sz="1200" dirty="0"/>
+            <a:endParaRPr lang="ja-JP" sz="1200" dirty="0"/>
           </a:p>
         </p:txBody>
       </p:sp>
@@ -10075,7 +10075,7 @@
               <a:buNone/>
             </a:pPr>
             <a:r>
-              <a:rPr lang="en-US" sz="2200" b="1" dirty="0">
+              <a:rPr lang="ja-JP" altLang="en-US" sz="2200" b="1" dirty="0">
                 <a:solidFill>
                   <a:srgbClr val="1B2A49"/>
                 </a:solidFill>
@@ -10085,7 +10085,7 @@
               </a:rPr>
               <a:t>導入後の受注処理は、人の作業が「確認」だけになる</a:t>
             </a:r>
-            <a:endParaRPr lang="en-US" sz="2200" dirty="0"/>
+            <a:endParaRPr lang="ja-JP" sz="2200" dirty="0"/>
           </a:p>
         </p:txBody>
       </p:sp>
@@ -10134,7 +10134,7 @@
               <a:buNone/>
             </a:pPr>
             <a:r>
-              <a:rPr lang="en-US" sz="1600" b="1" dirty="0">
+              <a:rPr lang="ja-JP" altLang="en-US" sz="1600" b="1" dirty="0">
                 <a:solidFill>
                   <a:srgbClr val="D9822B"/>
                 </a:solidFill>
@@ -10148,7 +10148,7 @@
               <a:buNone/>
             </a:pPr>
             <a:r>
-              <a:rPr lang="en-US" sz="1600" b="1" dirty="0">
+              <a:rPr lang="ja-JP" altLang="en-US" sz="1600" b="1" dirty="0">
                 <a:solidFill>
                   <a:srgbClr val="1B2A49"/>
                 </a:solidFill>
@@ -10158,7 +10158,7 @@
               </a:rPr>
               <a:t>担当者は「入力」から解放され、例外処理と顧客対応に時間を使える</a:t>
             </a:r>
-            <a:endParaRPr lang="en-US" sz="1600" dirty="0"/>
+            <a:endParaRPr lang="ja-JP" sz="1600" dirty="0"/>
           </a:p>
         </p:txBody>
       </p:sp>
@@ -10227,7 +10227,7 @@
               <a:buNone/>
             </a:pPr>
             <a:r>
-              <a:rPr lang="en-US" sz="1300" b="1" dirty="0">
+              <a:rPr lang="ja-JP" altLang="en-US" sz="1300" b="1" dirty="0">
                 <a:solidFill>
                   <a:srgbClr val="FFFFFF"/>
                 </a:solidFill>
@@ -10237,7 +10237,7 @@
               </a:rPr>
               <a:t>STEP 1</a:t>
             </a:r>
-            <a:endParaRPr lang="en-US" sz="1300" dirty="0"/>
+            <a:endParaRPr lang="ja-JP" sz="1300" dirty="0"/>
           </a:p>
         </p:txBody>
       </p:sp>
@@ -10289,7 +10289,7 @@
               <a:buNone/>
             </a:pPr>
             <a:r>
-              <a:rPr lang="en-US" sz="1700" b="1" dirty="0">
+              <a:rPr lang="ja-JP" altLang="en-US" sz="1700" b="1" dirty="0">
                 <a:solidFill>
                   <a:srgbClr val="1B2A49"/>
                 </a:solidFill>
@@ -10299,7 +10299,7 @@
               </a:rPr>
               <a:t>注文書を受信</a:t>
             </a:r>
-            <a:endParaRPr lang="en-US" sz="1700" dirty="0"/>
+            <a:endParaRPr lang="ja-JP" sz="1700" dirty="0"/>
           </a:p>
           <a:p>
             <a:pPr indent="0" marL="0">
@@ -10309,7 +10309,7 @@
               <a:buNone/>
             </a:pPr>
             <a:r>
-              <a:rPr lang="en-US" sz="1400" dirty="0">
+              <a:rPr lang="ja-JP" altLang="en-US" sz="1400" dirty="0">
                 <a:solidFill>
                   <a:srgbClr val="222222"/>
                 </a:solidFill>
@@ -10320,7 +10320,7 @@
               <a:t>FAX・メール・PDFを</a:t>
             </a:r>
             <a:br>
-              <a:rPr lang="en-US" sz="1400" dirty="0">
+              <a:rPr lang="ja-JP" altLang="en-US" sz="1400" dirty="0">
                 <a:solidFill>
                   <a:srgbClr val="222222"/>
                 </a:solidFill>
@@ -10330,7 +10330,7 @@
               </a:rPr>
             </a:br>
             <a:r>
-              <a:rPr lang="en-US" sz="1400" dirty="0">
+              <a:rPr lang="ja-JP" altLang="en-US" sz="1400" dirty="0">
                 <a:solidFill>
                   <a:srgbClr val="222222"/>
                 </a:solidFill>
@@ -10340,7 +10340,7 @@
               </a:rPr>
               <a:t>専用フォルダに自動保存</a:t>
             </a:r>
-            <a:endParaRPr lang="en-US" sz="1700" dirty="0"/>
+            <a:endParaRPr lang="ja-JP" sz="1700" dirty="0"/>
           </a:p>
         </p:txBody>
       </p:sp>
@@ -10409,7 +10409,7 @@
               <a:buNone/>
             </a:pPr>
             <a:r>
-              <a:rPr lang="en-US" sz="1300" b="1" dirty="0">
+              <a:rPr lang="ja-JP" altLang="en-US" sz="1300" b="1" dirty="0">
                 <a:solidFill>
                   <a:srgbClr val="FFFFFF"/>
                 </a:solidFill>
@@ -10419,7 +10419,7 @@
               </a:rPr>
               <a:t>STEP 2</a:t>
             </a:r>
-            <a:endParaRPr lang="en-US" sz="1300" dirty="0"/>
+            <a:endParaRPr lang="ja-JP" sz="1300" dirty="0"/>
           </a:p>
         </p:txBody>
       </p:sp>
@@ -10471,7 +10471,7 @@
               <a:buNone/>
             </a:pPr>
             <a:r>
-              <a:rPr lang="en-US" sz="1700" b="1" dirty="0">
+              <a:rPr lang="ja-JP" altLang="en-US" sz="1700" b="1" dirty="0">
                 <a:solidFill>
                   <a:srgbClr val="1B2A49"/>
                 </a:solidFill>
@@ -10481,7 +10481,7 @@
               </a:rPr>
               <a:t>AIが読み取り</a:t>
             </a:r>
-            <a:endParaRPr lang="en-US" sz="1700" dirty="0"/>
+            <a:endParaRPr lang="ja-JP" sz="1700" dirty="0"/>
           </a:p>
           <a:p>
             <a:pPr indent="0" marL="0">
@@ -10491,7 +10491,7 @@
               <a:buNone/>
             </a:pPr>
             <a:r>
-              <a:rPr lang="en-US" sz="1400" dirty="0">
+              <a:rPr lang="ja-JP" altLang="en-US" sz="1400" dirty="0">
                 <a:solidFill>
                   <a:srgbClr val="222222"/>
                 </a:solidFill>
@@ -10502,7 +10502,7 @@
               <a:t>品番・数量・納期を</a:t>
             </a:r>
             <a:br>
-              <a:rPr lang="en-US" sz="1400" dirty="0">
+              <a:rPr lang="ja-JP" altLang="en-US" sz="1400" dirty="0">
                 <a:solidFill>
                   <a:srgbClr val="222222"/>
                 </a:solidFill>
@@ -10512,7 +10512,7 @@
               </a:rPr>
             </a:br>
             <a:r>
-              <a:rPr lang="en-US" sz="1400" dirty="0">
+              <a:rPr lang="ja-JP" altLang="en-US" sz="1400" dirty="0">
                 <a:solidFill>
                   <a:srgbClr val="222222"/>
                 </a:solidFill>
@@ -10523,7 +10523,7 @@
               <a:t>抽出し、品番マスタと</a:t>
             </a:r>
             <a:br>
-              <a:rPr lang="en-US" sz="1400" dirty="0">
+              <a:rPr lang="ja-JP" altLang="en-US" sz="1400" dirty="0">
                 <a:solidFill>
                   <a:srgbClr val="222222"/>
                 </a:solidFill>
@@ -10533,7 +10533,7 @@
               </a:rPr>
             </a:br>
             <a:r>
-              <a:rPr lang="en-US" sz="1400" dirty="0">
+              <a:rPr lang="ja-JP" altLang="en-US" sz="1400" dirty="0">
                 <a:solidFill>
                   <a:srgbClr val="222222"/>
                 </a:solidFill>
@@ -10543,7 +10543,7 @@
               </a:rPr>
               <a:t>照合</a:t>
             </a:r>
-            <a:endParaRPr lang="en-US" sz="1700" dirty="0"/>
+            <a:endParaRPr lang="ja-JP" sz="1700" dirty="0"/>
           </a:p>
         </p:txBody>
       </p:sp>
@@ -10612,7 +10612,7 @@
               <a:buNone/>
             </a:pPr>
             <a:r>
-              <a:rPr lang="en-US" sz="1300" b="1" dirty="0">
+              <a:rPr lang="ja-JP" altLang="en-US" sz="1300" b="1" dirty="0">
                 <a:solidFill>
                   <a:srgbClr val="FFFFFF"/>
                 </a:solidFill>
@@ -10622,7 +10622,7 @@
               </a:rPr>
               <a:t>STEP 3</a:t>
             </a:r>
-            <a:endParaRPr lang="en-US" sz="1300" dirty="0"/>
+            <a:endParaRPr lang="ja-JP" sz="1300" dirty="0"/>
           </a:p>
         </p:txBody>
       </p:sp>
@@ -10674,7 +10674,7 @@
               <a:buNone/>
             </a:pPr>
             <a:r>
-              <a:rPr lang="en-US" sz="1700" b="1" dirty="0">
+              <a:rPr lang="ja-JP" altLang="en-US" sz="1700" b="1" dirty="0">
                 <a:solidFill>
                   <a:srgbClr val="1B2A49"/>
                 </a:solidFill>
@@ -10684,7 +10684,7 @@
               </a:rPr>
               <a:t>システムに登録</a:t>
             </a:r>
-            <a:endParaRPr lang="en-US" sz="1700" dirty="0"/>
+            <a:endParaRPr lang="ja-JP" sz="1700" dirty="0"/>
           </a:p>
           <a:p>
             <a:pPr indent="0" marL="0">
@@ -10694,7 +10694,7 @@
               <a:buNone/>
             </a:pPr>
             <a:r>
-              <a:rPr lang="en-US" sz="1400" dirty="0">
+              <a:rPr lang="ja-JP" altLang="en-US" sz="1400" dirty="0">
                 <a:solidFill>
                   <a:srgbClr val="222222"/>
                 </a:solidFill>
@@ -10705,7 +10705,7 @@
               <a:t>照合済みのデータを</a:t>
             </a:r>
             <a:br>
-              <a:rPr lang="en-US" sz="1400" dirty="0">
+              <a:rPr lang="ja-JP" altLang="en-US" sz="1400" dirty="0">
                 <a:solidFill>
                   <a:srgbClr val="222222"/>
                 </a:solidFill>
@@ -10715,7 +10715,7 @@
               </a:rPr>
             </a:br>
             <a:r>
-              <a:rPr lang="en-US" sz="1400" dirty="0">
+              <a:rPr lang="ja-JP" altLang="en-US" sz="1400" dirty="0">
                 <a:solidFill>
                   <a:srgbClr val="222222"/>
                 </a:solidFill>
@@ -10725,7 +10725,7 @@
               </a:rPr>
               <a:t>API経由で基幹システムに登録</a:t>
             </a:r>
-            <a:endParaRPr lang="en-US" sz="1700" dirty="0"/>
+            <a:endParaRPr lang="ja-JP" sz="1700" dirty="0"/>
           </a:p>
         </p:txBody>
       </p:sp>
@@ -10774,7 +10774,7 @@
               <a:buNone/>
             </a:pPr>
             <a:r>
-              <a:rPr lang="en-US" sz="1300" b="1" dirty="0">
+              <a:rPr lang="ja-JP" altLang="en-US" sz="1300" b="1" dirty="0">
                 <a:solidFill>
                   <a:srgbClr val="FFFFFF"/>
                 </a:solidFill>
@@ -10784,7 +10784,7 @@
               </a:rPr>
               <a:t>STEP 4</a:t>
             </a:r>
-            <a:endParaRPr lang="en-US" sz="1300" dirty="0"/>
+            <a:endParaRPr lang="ja-JP" sz="1300" dirty="0"/>
           </a:p>
         </p:txBody>
       </p:sp>
@@ -10836,7 +10836,7 @@
               <a:buNone/>
             </a:pPr>
             <a:r>
-              <a:rPr lang="en-US" sz="1700" b="1" dirty="0">
+              <a:rPr lang="ja-JP" altLang="en-US" sz="1700" b="1" dirty="0">
                 <a:solidFill>
                   <a:srgbClr val="1B2A49"/>
                 </a:solidFill>
@@ -10846,7 +10846,7 @@
               </a:rPr>
               <a:t>差異だけ確認</a:t>
             </a:r>
-            <a:endParaRPr lang="en-US" sz="1700" dirty="0"/>
+            <a:endParaRPr lang="ja-JP" sz="1700" dirty="0"/>
           </a:p>
           <a:p>
             <a:pPr indent="0" marL="0">
@@ -10856,7 +10856,7 @@
               <a:buNone/>
             </a:pPr>
             <a:r>
-              <a:rPr lang="en-US" sz="1400" dirty="0">
+              <a:rPr lang="ja-JP" altLang="en-US" sz="1400" dirty="0">
                 <a:solidFill>
                   <a:srgbClr val="222222"/>
                 </a:solidFill>
@@ -10867,7 +10867,7 @@
               <a:t>照合できなかった</a:t>
             </a:r>
             <a:br>
-              <a:rPr lang="en-US" sz="1400" dirty="0">
+              <a:rPr lang="ja-JP" altLang="en-US" sz="1400" dirty="0">
                 <a:solidFill>
                   <a:srgbClr val="222222"/>
                 </a:solidFill>
@@ -10877,7 +10877,7 @@
               </a:rPr>
             </a:br>
             <a:r>
-              <a:rPr lang="en-US" sz="1400" dirty="0">
+              <a:rPr lang="ja-JP" altLang="en-US" sz="1400" dirty="0">
                 <a:solidFill>
                   <a:srgbClr val="222222"/>
                 </a:solidFill>
@@ -10885,30 +10885,9 @@
                 <a:ea typeface="Meiryo" pitchFamily="34" charset="-122"/>
                 <a:cs typeface="Meiryo" pitchFamily="34" charset="-120"/>
               </a:rPr>
-              <a:t>項目のみ担当者に</a:t>
-            </a:r>
-            <a:br>
-              <a:rPr lang="en-US" sz="1400" dirty="0">
-                <a:solidFill>
-                  <a:srgbClr val="222222"/>
-                </a:solidFill>
-                <a:latin typeface="Meiryo" pitchFamily="34" charset="0"/>
-                <a:ea typeface="Meiryo" pitchFamily="34" charset="-122"/>
-                <a:cs typeface="Meiryo" pitchFamily="34" charset="-120"/>
-              </a:rPr>
-            </a:br>
-            <a:r>
-              <a:rPr lang="en-US" sz="1400" dirty="0">
-                <a:solidFill>
-                  <a:srgbClr val="222222"/>
-                </a:solidFill>
-                <a:latin typeface="Meiryo" pitchFamily="34" charset="0"/>
-                <a:ea typeface="Meiryo" pitchFamily="34" charset="-122"/>
-                <a:cs typeface="Meiryo" pitchFamily="34" charset="-120"/>
-              </a:rPr>
-              <a:t>通知し、人が最終判断</a:t>
-            </a:r>
-            <a:endParaRPr lang="en-US" sz="1700" dirty="0"/>
+              <a:t>項目のみ担当者に通知し、人が最終判断</a:t>
+            </a:r>
+            <a:endParaRPr lang="ja-JP" sz="1700" dirty="0"/>
           </a:p>
         </p:txBody>
       </p:sp>
